--- a/dist/초2/수학/도형과측정/초2_수학_도형과측정_05_시각과시간.pptx
+++ b/dist/초2/수학/도형과측정/초2_수학_도형과측정_05_시각과시간.pptx
@@ -122,13 +122,13 @@
   <p:extLst>
     <p:ext uri="{521415D9-36F7-43E2-AB2F-B90AF26B5E84}">
       <p14:sectionLst xmlns:p14="http://schemas.microsoft.com/office/powerpoint/2010/main">
-        <p14:section name="도입" id="{daf7a940-0f6b-5e1e-45c6-552432b5f379}">
+        <p14:section name="도입" id="{38a8cda9-17e5-002b-7275-316c718fa998}">
           <p14:sldIdLst>
             <p14:sldId id="256"/>
             <p14:sldId id="257"/>
           </p14:sldIdLst>
         </p14:section>
-        <p14:section name="개념" id="{b3c7d12f-8196-94ee-4b40-2e57f8b04d1d}">
+        <p14:section name="개념" id="{70aba676-1d9a-5447-6b47-95ba956f7d86}">
           <p14:sldIdLst>
             <p14:sldId id="258"/>
             <p14:sldId id="259"/>
@@ -138,32 +138,32 @@
             <p14:sldId id="265"/>
           </p14:sldIdLst>
         </p14:section>
-        <p14:section name="연습" id="{0033a0d7-06f5-817d-0da2-1fcdb1aa6fde}">
+        <p14:section name="연습" id="{754f92ff-469b-d1e8-ce6b-2ca30af2389f}">
           <p14:sldIdLst>
             <p14:sldId id="261"/>
             <p14:sldId id="262"/>
             <p14:sldId id="266"/>
           </p14:sldIdLst>
         </p14:section>
-        <p14:section name="개념" id="{c09e4b29-35cd-2d6a-5cb3-dd7828e7491f}">
+        <p14:section name="개념" id="{387f458e-7495-cebd-f9ae-89f6b2560acf}">
           <p14:sldIdLst/>
         </p14:section>
-        <p14:section name="연습" id="{be355b16-dea3-e318-f51b-5c6b2d27f02c}">
+        <p14:section name="연습" id="{e92f2bbd-0a58-e1ed-e7bb-7b3a50ce6233}">
           <p14:sldIdLst/>
         </p14:section>
-        <p14:section name="확인" id="{b5cc2c3f-5df9-4da6-bbc8-9f90644fd598}">
+        <p14:section name="확인" id="{47f339d0-170e-2701-5026-5b20a099d1ee}">
           <p14:sldIdLst>
             <p14:sldId id="267"/>
             <p14:sldId id="268"/>
             <p14:sldId id="269"/>
           </p14:sldIdLst>
         </p14:section>
-        <p14:section name="정리" id="{80c54f45-9287-0ca5-723e-00c15797fda1}">
+        <p14:section name="정리" id="{a1ed4a51-7361-3de6-5d09-f1b9163f4d29}">
           <p14:sldIdLst>
             <p14:sldId id="270"/>
           </p14:sldIdLst>
         </p14:section>
-        <p14:section name="보충" id="{7845b05c-c770-f9b6-c4c5-24df0b3cfef3}">
+        <p14:section name="보충" id="{7444c098-fdff-0150-6cf1-20d7f720d477}">
           <p14:sldIdLst>
             <p14:sldId id="271"/>
           </p14:sldIdLst>
@@ -4644,7 +4644,7 @@
         </p:nvSpPr>
         <p:spPr>
           <a:xfrm>
-            <a:off x="9913925" y="982638"/>
+            <a:off x="9950501" y="919286"/>
             <a:ext cx="548640" cy="365760"/>
           </a:xfrm>
           <a:prstGeom prst="rect">
@@ -4683,7 +4683,7 @@
         </p:nvSpPr>
         <p:spPr>
           <a:xfrm>
-            <a:off x="10310202" y="1378915"/>
+            <a:off x="10373554" y="1342339"/>
             <a:ext cx="548640" cy="365760"/>
           </a:xfrm>
           <a:prstGeom prst="rect">
@@ -4722,7 +4722,7 @@
         </p:nvSpPr>
         <p:spPr>
           <a:xfrm>
-            <a:off x="10455250" y="1920240"/>
+            <a:off x="10528402" y="1920240"/>
             <a:ext cx="548640" cy="365760"/>
           </a:xfrm>
           <a:prstGeom prst="rect">
@@ -4761,7 +4761,7 @@
         </p:nvSpPr>
         <p:spPr>
           <a:xfrm>
-            <a:off x="10310202" y="2461565"/>
+            <a:off x="10373554" y="2498141"/>
             <a:ext cx="548640" cy="365760"/>
           </a:xfrm>
           <a:prstGeom prst="rect">
@@ -4800,7 +4800,7 @@
         </p:nvSpPr>
         <p:spPr>
           <a:xfrm>
-            <a:off x="9913925" y="2857842"/>
+            <a:off x="9950501" y="2921194"/>
             <a:ext cx="548640" cy="365760"/>
           </a:xfrm>
           <a:prstGeom prst="rect">
@@ -4839,7 +4839,7 @@
         </p:nvSpPr>
         <p:spPr>
           <a:xfrm>
-            <a:off x="9372600" y="3002890"/>
+            <a:off x="9372600" y="3076042"/>
             <a:ext cx="548640" cy="365760"/>
           </a:xfrm>
           <a:prstGeom prst="rect">
@@ -4878,7 +4878,7 @@
         </p:nvSpPr>
         <p:spPr>
           <a:xfrm>
-            <a:off x="8831275" y="2857842"/>
+            <a:off x="8794699" y="2921194"/>
             <a:ext cx="548640" cy="365760"/>
           </a:xfrm>
           <a:prstGeom prst="rect">
@@ -4917,7 +4917,7 @@
         </p:nvSpPr>
         <p:spPr>
           <a:xfrm>
-            <a:off x="8434998" y="2461565"/>
+            <a:off x="8371646" y="2498141"/>
             <a:ext cx="548640" cy="365760"/>
           </a:xfrm>
           <a:prstGeom prst="rect">
@@ -4956,7 +4956,7 @@
         </p:nvSpPr>
         <p:spPr>
           <a:xfrm>
-            <a:off x="8289950" y="1920240"/>
+            <a:off x="8216798" y="1920240"/>
             <a:ext cx="548640" cy="365760"/>
           </a:xfrm>
           <a:prstGeom prst="rect">
@@ -4995,7 +4995,7 @@
         </p:nvSpPr>
         <p:spPr>
           <a:xfrm>
-            <a:off x="8434998" y="1378915"/>
+            <a:off x="8371646" y="1342339"/>
             <a:ext cx="548640" cy="365760"/>
           </a:xfrm>
           <a:prstGeom prst="rect">
@@ -5034,7 +5034,7 @@
         </p:nvSpPr>
         <p:spPr>
           <a:xfrm>
-            <a:off x="8831275" y="982638"/>
+            <a:off x="8794699" y="919286"/>
             <a:ext cx="548640" cy="365760"/>
           </a:xfrm>
           <a:prstGeom prst="rect">
@@ -5073,7 +5073,7 @@
         </p:nvSpPr>
         <p:spPr>
           <a:xfrm>
-            <a:off x="9372600" y="837590"/>
+            <a:off x="9372600" y="764438"/>
             <a:ext cx="548640" cy="365760"/>
           </a:xfrm>
           <a:prstGeom prst="rect">
@@ -5112,8 +5112,8 @@
         </p:nvSpPr>
         <p:spPr>
           <a:xfrm flipH="1">
-            <a:off x="8983938" y="2103120"/>
-            <a:ext cx="662982" cy="309154"/>
+            <a:off x="9063496" y="2103120"/>
+            <a:ext cx="583424" cy="272055"/>
           </a:xfrm>
           <a:prstGeom prst="line">
             <a:avLst/>
@@ -5135,8 +5135,8 @@
         </p:nvSpPr>
         <p:spPr>
           <a:xfrm flipV="1">
-            <a:off x="9646920" y="1532534"/>
-            <a:ext cx="988283" cy="570586"/>
+            <a:off x="9646920" y="1634947"/>
+            <a:ext cx="810899" cy="468173"/>
           </a:xfrm>
           <a:prstGeom prst="line">
             <a:avLst/>
@@ -8510,7 +8510,7 @@
         </p:nvSpPr>
         <p:spPr>
           <a:xfrm>
-            <a:off x="2495409" y="2293895"/>
+            <a:off x="2527785" y="2237819"/>
             <a:ext cx="548640" cy="365760"/>
           </a:xfrm>
           <a:prstGeom prst="rect">
@@ -8549,7 +8549,7 @@
         </p:nvSpPr>
         <p:spPr>
           <a:xfrm>
-            <a:off x="2846176" y="2644662"/>
+            <a:off x="2902252" y="2612286"/>
             <a:ext cx="548640" cy="365760"/>
           </a:xfrm>
           <a:prstGeom prst="rect">
@@ -8588,7 +8588,7 @@
         </p:nvSpPr>
         <p:spPr>
           <a:xfrm>
-            <a:off x="2974566" y="3123819"/>
+            <a:off x="3039317" y="3123819"/>
             <a:ext cx="548640" cy="365760"/>
           </a:xfrm>
           <a:prstGeom prst="rect">
@@ -8627,7 +8627,7 @@
         </p:nvSpPr>
         <p:spPr>
           <a:xfrm>
-            <a:off x="2846176" y="3602976"/>
+            <a:off x="2902252" y="3635352"/>
             <a:ext cx="548640" cy="365760"/>
           </a:xfrm>
           <a:prstGeom prst="rect">
@@ -8666,7 +8666,7 @@
         </p:nvSpPr>
         <p:spPr>
           <a:xfrm>
-            <a:off x="2495409" y="3953743"/>
+            <a:off x="2527785" y="4009819"/>
             <a:ext cx="548640" cy="365760"/>
           </a:xfrm>
           <a:prstGeom prst="rect">
@@ -8705,7 +8705,7 @@
         </p:nvSpPr>
         <p:spPr>
           <a:xfrm>
-            <a:off x="2016252" y="4082133"/>
+            <a:off x="2016252" y="4146884"/>
             <a:ext cx="548640" cy="365760"/>
           </a:xfrm>
           <a:prstGeom prst="rect">
@@ -8744,7 +8744,7 @@
         </p:nvSpPr>
         <p:spPr>
           <a:xfrm>
-            <a:off x="1537095" y="3953743"/>
+            <a:off x="1504719" y="4009819"/>
             <a:ext cx="548640" cy="365760"/>
           </a:xfrm>
           <a:prstGeom prst="rect">
@@ -8783,7 +8783,7 @@
         </p:nvSpPr>
         <p:spPr>
           <a:xfrm>
-            <a:off x="1186328" y="3602976"/>
+            <a:off x="1130252" y="3635352"/>
             <a:ext cx="548640" cy="365760"/>
           </a:xfrm>
           <a:prstGeom prst="rect">
@@ -8822,7 +8822,7 @@
         </p:nvSpPr>
         <p:spPr>
           <a:xfrm>
-            <a:off x="1057938" y="3123819"/>
+            <a:off x="993187" y="3123819"/>
             <a:ext cx="548640" cy="365760"/>
           </a:xfrm>
           <a:prstGeom prst="rect">
@@ -8861,7 +8861,7 @@
         </p:nvSpPr>
         <p:spPr>
           <a:xfrm>
-            <a:off x="1186328" y="2644662"/>
+            <a:off x="1130252" y="2612286"/>
             <a:ext cx="548640" cy="365760"/>
           </a:xfrm>
           <a:prstGeom prst="rect">
@@ -8900,7 +8900,7 @@
         </p:nvSpPr>
         <p:spPr>
           <a:xfrm>
-            <a:off x="1537095" y="2293895"/>
+            <a:off x="1504719" y="2237819"/>
             <a:ext cx="548640" cy="365760"/>
           </a:xfrm>
           <a:prstGeom prst="rect">
@@ -8939,7 +8939,7 @@
         </p:nvSpPr>
         <p:spPr>
           <a:xfrm>
-            <a:off x="2016252" y="2165505"/>
+            <a:off x="2016252" y="2100754"/>
             <a:ext cx="548640" cy="365760"/>
           </a:xfrm>
           <a:prstGeom prst="rect">
@@ -8979,7 +8979,7 @@
         <p:spPr>
           <a:xfrm>
             <a:off x="2290572" y="3306699"/>
-            <a:ext cx="112439" cy="637672"/>
+            <a:ext cx="98946" cy="561152"/>
           </a:xfrm>
           <a:prstGeom prst="line">
             <a:avLst/>
@@ -9001,8 +9001,8 @@
         </p:nvSpPr>
         <p:spPr>
           <a:xfrm flipH="1">
-            <a:off x="1415787" y="3306699"/>
-            <a:ext cx="874785" cy="505057"/>
+            <a:off x="1572800" y="3306699"/>
+            <a:ext cx="717772" cy="414406"/>
           </a:xfrm>
           <a:prstGeom prst="line">
             <a:avLst/>
@@ -10493,7 +10493,7 @@
         </p:nvSpPr>
         <p:spPr>
           <a:xfrm>
-            <a:off x="6299313" y="2293895"/>
+            <a:off x="6331689" y="2237819"/>
             <a:ext cx="548640" cy="365760"/>
           </a:xfrm>
           <a:prstGeom prst="rect">
@@ -10532,7 +10532,7 @@
         </p:nvSpPr>
         <p:spPr>
           <a:xfrm>
-            <a:off x="6650080" y="2644662"/>
+            <a:off x="6706156" y="2612286"/>
             <a:ext cx="548640" cy="365760"/>
           </a:xfrm>
           <a:prstGeom prst="rect">
@@ -10571,7 +10571,7 @@
         </p:nvSpPr>
         <p:spPr>
           <a:xfrm>
-            <a:off x="6778470" y="3123819"/>
+            <a:off x="6843221" y="3123819"/>
             <a:ext cx="548640" cy="365760"/>
           </a:xfrm>
           <a:prstGeom prst="rect">
@@ -10610,7 +10610,7 @@
         </p:nvSpPr>
         <p:spPr>
           <a:xfrm>
-            <a:off x="6650080" y="3602976"/>
+            <a:off x="6706156" y="3635352"/>
             <a:ext cx="548640" cy="365760"/>
           </a:xfrm>
           <a:prstGeom prst="rect">
@@ -10649,7 +10649,7 @@
         </p:nvSpPr>
         <p:spPr>
           <a:xfrm>
-            <a:off x="6299313" y="3953743"/>
+            <a:off x="6331689" y="4009819"/>
             <a:ext cx="548640" cy="365760"/>
           </a:xfrm>
           <a:prstGeom prst="rect">
@@ -10688,7 +10688,7 @@
         </p:nvSpPr>
         <p:spPr>
           <a:xfrm>
-            <a:off x="5820156" y="4082133"/>
+            <a:off x="5820156" y="4146884"/>
             <a:ext cx="548640" cy="365760"/>
           </a:xfrm>
           <a:prstGeom prst="rect">
@@ -10727,7 +10727,7 @@
         </p:nvSpPr>
         <p:spPr>
           <a:xfrm>
-            <a:off x="5340999" y="3953743"/>
+            <a:off x="5308623" y="4009819"/>
             <a:ext cx="548640" cy="365760"/>
           </a:xfrm>
           <a:prstGeom prst="rect">
@@ -10766,7 +10766,7 @@
         </p:nvSpPr>
         <p:spPr>
           <a:xfrm>
-            <a:off x="4990232" y="3602976"/>
+            <a:off x="4934156" y="3635352"/>
             <a:ext cx="548640" cy="365760"/>
           </a:xfrm>
           <a:prstGeom prst="rect">
@@ -10805,7 +10805,7 @@
         </p:nvSpPr>
         <p:spPr>
           <a:xfrm>
-            <a:off x="4861842" y="3123819"/>
+            <a:off x="4797091" y="3123819"/>
             <a:ext cx="548640" cy="365760"/>
           </a:xfrm>
           <a:prstGeom prst="rect">
@@ -10844,7 +10844,7 @@
         </p:nvSpPr>
         <p:spPr>
           <a:xfrm>
-            <a:off x="4990232" y="2644662"/>
+            <a:off x="4934156" y="2612286"/>
             <a:ext cx="548640" cy="365760"/>
           </a:xfrm>
           <a:prstGeom prst="rect">
@@ -10883,7 +10883,7 @@
         </p:nvSpPr>
         <p:spPr>
           <a:xfrm>
-            <a:off x="5340999" y="2293895"/>
+            <a:off x="5308623" y="2237819"/>
             <a:ext cx="548640" cy="365760"/>
           </a:xfrm>
           <a:prstGeom prst="rect">
@@ -10922,7 +10922,7 @@
         </p:nvSpPr>
         <p:spPr>
           <a:xfrm>
-            <a:off x="5820156" y="2165505"/>
+            <a:off x="5820156" y="2100754"/>
             <a:ext cx="548640" cy="365760"/>
           </a:xfrm>
           <a:prstGeom prst="rect">
@@ -10961,8 +10961,8 @@
         </p:nvSpPr>
         <p:spPr>
           <a:xfrm flipH="1" flipV="1">
-            <a:off x="5573971" y="2921546"/>
-            <a:ext cx="520505" cy="385153"/>
+            <a:off x="5636432" y="2967764"/>
+            <a:ext cx="458044" cy="338935"/>
           </a:xfrm>
           <a:prstGeom prst="line">
             <a:avLst/>
@@ -10984,8 +10984,8 @@
         </p:nvSpPr>
         <p:spPr>
           <a:xfrm flipV="1">
-            <a:off x="6094476" y="3096684"/>
-            <a:ext cx="988041" cy="210015"/>
+            <a:off x="6094476" y="3134379"/>
+            <a:ext cx="810701" cy="172320"/>
           </a:xfrm>
           <a:prstGeom prst="line">
             <a:avLst/>
@@ -13585,7 +13585,7 @@
         </p:nvSpPr>
         <p:spPr>
           <a:xfrm>
-            <a:off x="2445913" y="2964732"/>
+            <a:off x="2475974" y="2912665"/>
             <a:ext cx="548640" cy="365760"/>
           </a:xfrm>
           <a:prstGeom prst="rect">
@@ -13624,7 +13624,7 @@
         </p:nvSpPr>
         <p:spPr>
           <a:xfrm>
-            <a:off x="2771604" y="3290423"/>
+            <a:off x="2823671" y="3260362"/>
             <a:ext cx="548640" cy="365760"/>
           </a:xfrm>
           <a:prstGeom prst="rect">
@@ -13663,7 +13663,7 @@
         </p:nvSpPr>
         <p:spPr>
           <a:xfrm>
-            <a:off x="2890815" y="3735324"/>
+            <a:off x="2950936" y="3735324"/>
             <a:ext cx="548640" cy="365760"/>
           </a:xfrm>
           <a:prstGeom prst="rect">
@@ -13702,7 +13702,7 @@
         </p:nvSpPr>
         <p:spPr>
           <a:xfrm>
-            <a:off x="2771604" y="4180225"/>
+            <a:off x="2823671" y="4210286"/>
             <a:ext cx="548640" cy="365760"/>
           </a:xfrm>
           <a:prstGeom prst="rect">
@@ -13741,7 +13741,7 @@
         </p:nvSpPr>
         <p:spPr>
           <a:xfrm>
-            <a:off x="2445913" y="4505916"/>
+            <a:off x="2475974" y="4557983"/>
             <a:ext cx="548640" cy="365760"/>
           </a:xfrm>
           <a:prstGeom prst="rect">
@@ -13780,7 +13780,7 @@
         </p:nvSpPr>
         <p:spPr>
           <a:xfrm>
-            <a:off x="2001012" y="4625127"/>
+            <a:off x="2001012" y="4685248"/>
             <a:ext cx="548640" cy="365760"/>
           </a:xfrm>
           <a:prstGeom prst="rect">
@@ -13819,7 +13819,7 @@
         </p:nvSpPr>
         <p:spPr>
           <a:xfrm>
-            <a:off x="1556111" y="4505916"/>
+            <a:off x="1526050" y="4557983"/>
             <a:ext cx="548640" cy="365760"/>
           </a:xfrm>
           <a:prstGeom prst="rect">
@@ -13858,7 +13858,7 @@
         </p:nvSpPr>
         <p:spPr>
           <a:xfrm>
-            <a:off x="1230420" y="4180225"/>
+            <a:off x="1178353" y="4210286"/>
             <a:ext cx="548640" cy="365760"/>
           </a:xfrm>
           <a:prstGeom prst="rect">
@@ -13897,7 +13897,7 @@
         </p:nvSpPr>
         <p:spPr>
           <a:xfrm>
-            <a:off x="1111209" y="3735324"/>
+            <a:off x="1051088" y="3735324"/>
             <a:ext cx="548640" cy="365760"/>
           </a:xfrm>
           <a:prstGeom prst="rect">
@@ -13936,7 +13936,7 @@
         </p:nvSpPr>
         <p:spPr>
           <a:xfrm>
-            <a:off x="1230420" y="3290423"/>
+            <a:off x="1178353" y="3260362"/>
             <a:ext cx="548640" cy="365760"/>
           </a:xfrm>
           <a:prstGeom prst="rect">
@@ -13975,7 +13975,7 @@
         </p:nvSpPr>
         <p:spPr>
           <a:xfrm>
-            <a:off x="1556111" y="2964732"/>
+            <a:off x="1526050" y="2912665"/>
             <a:ext cx="548640" cy="365760"/>
           </a:xfrm>
           <a:prstGeom prst="rect">
@@ -14014,7 +14014,7 @@
         </p:nvSpPr>
         <p:spPr>
           <a:xfrm>
-            <a:off x="2001012" y="2845521"/>
+            <a:off x="2001012" y="2785400"/>
             <a:ext cx="548640" cy="365760"/>
           </a:xfrm>
           <a:prstGeom prst="rect">
@@ -14053,8 +14053,8 @@
         </p:nvSpPr>
         <p:spPr>
           <a:xfrm flipV="1">
-            <a:off x="2275332" y="3767671"/>
-            <a:ext cx="582068" cy="150533"/>
+            <a:off x="2275332" y="3785735"/>
+            <a:ext cx="512220" cy="132469"/>
           </a:xfrm>
           <a:prstGeom prst="line">
             <a:avLst/>
@@ -14076,8 +14076,8 @@
         </p:nvSpPr>
         <p:spPr>
           <a:xfrm flipH="1">
-            <a:off x="2177295" y="3918204"/>
-            <a:ext cx="98037" cy="932762"/>
+            <a:off x="2194891" y="3918204"/>
+            <a:ext cx="80441" cy="765343"/>
           </a:xfrm>
           <a:prstGeom prst="line">
             <a:avLst/>
@@ -15576,7 +15576,7 @@
         </p:nvSpPr>
         <p:spPr>
           <a:xfrm>
-            <a:off x="6265057" y="2964732"/>
+            <a:off x="6295118" y="2912665"/>
             <a:ext cx="548640" cy="365760"/>
           </a:xfrm>
           <a:prstGeom prst="rect">
@@ -15615,7 +15615,7 @@
         </p:nvSpPr>
         <p:spPr>
           <a:xfrm>
-            <a:off x="6590748" y="3290423"/>
+            <a:off x="6642815" y="3260362"/>
             <a:ext cx="548640" cy="365760"/>
           </a:xfrm>
           <a:prstGeom prst="rect">
@@ -15654,7 +15654,7 @@
         </p:nvSpPr>
         <p:spPr>
           <a:xfrm>
-            <a:off x="6709959" y="3735324"/>
+            <a:off x="6770080" y="3735324"/>
             <a:ext cx="548640" cy="365760"/>
           </a:xfrm>
           <a:prstGeom prst="rect">
@@ -15693,7 +15693,7 @@
         </p:nvSpPr>
         <p:spPr>
           <a:xfrm>
-            <a:off x="6590748" y="4180225"/>
+            <a:off x="6642815" y="4210286"/>
             <a:ext cx="548640" cy="365760"/>
           </a:xfrm>
           <a:prstGeom prst="rect">
@@ -15732,7 +15732,7 @@
         </p:nvSpPr>
         <p:spPr>
           <a:xfrm>
-            <a:off x="6265057" y="4505916"/>
+            <a:off x="6295118" y="4557983"/>
             <a:ext cx="548640" cy="365760"/>
           </a:xfrm>
           <a:prstGeom prst="rect">
@@ -15771,7 +15771,7 @@
         </p:nvSpPr>
         <p:spPr>
           <a:xfrm>
-            <a:off x="5820156" y="4625127"/>
+            <a:off x="5820156" y="4685248"/>
             <a:ext cx="548640" cy="365760"/>
           </a:xfrm>
           <a:prstGeom prst="rect">
@@ -15810,7 +15810,7 @@
         </p:nvSpPr>
         <p:spPr>
           <a:xfrm>
-            <a:off x="5375255" y="4505916"/>
+            <a:off x="5345194" y="4557983"/>
             <a:ext cx="548640" cy="365760"/>
           </a:xfrm>
           <a:prstGeom prst="rect">
@@ -15849,7 +15849,7 @@
         </p:nvSpPr>
         <p:spPr>
           <a:xfrm>
-            <a:off x="5049564" y="4180225"/>
+            <a:off x="4997497" y="4210286"/>
             <a:ext cx="548640" cy="365760"/>
           </a:xfrm>
           <a:prstGeom prst="rect">
@@ -15888,7 +15888,7 @@
         </p:nvSpPr>
         <p:spPr>
           <a:xfrm>
-            <a:off x="4930353" y="3735324"/>
+            <a:off x="4870232" y="3735324"/>
             <a:ext cx="548640" cy="365760"/>
           </a:xfrm>
           <a:prstGeom prst="rect">
@@ -15927,7 +15927,7 @@
         </p:nvSpPr>
         <p:spPr>
           <a:xfrm>
-            <a:off x="5049564" y="3290423"/>
+            <a:off x="4997497" y="3260362"/>
             <a:ext cx="548640" cy="365760"/>
           </a:xfrm>
           <a:prstGeom prst="rect">
@@ -15966,7 +15966,7 @@
         </p:nvSpPr>
         <p:spPr>
           <a:xfrm>
-            <a:off x="5375255" y="2964732"/>
+            <a:off x="5345194" y="2912665"/>
             <a:ext cx="548640" cy="365760"/>
           </a:xfrm>
           <a:prstGeom prst="rect">
@@ -16005,7 +16005,7 @@
         </p:nvSpPr>
         <p:spPr>
           <a:xfrm>
-            <a:off x="5820156" y="2845521"/>
+            <a:off x="5820156" y="2785400"/>
             <a:ext cx="548640" cy="365760"/>
           </a:xfrm>
           <a:prstGeom prst="rect">
@@ -16045,7 +16045,7 @@
         <p:spPr>
           <a:xfrm>
             <a:off x="6094476" y="3918204"/>
-            <a:ext cx="580732" cy="155607"/>
+            <a:ext cx="511044" cy="136934"/>
           </a:xfrm>
           <a:prstGeom prst="line">
             <a:avLst/>
@@ -16068,7 +16068,7 @@
         <p:spPr>
           <a:xfrm>
             <a:off x="6094476" y="3918204"/>
-            <a:ext cx="0" cy="937900"/>
+            <a:ext cx="0" cy="769559"/>
           </a:xfrm>
           <a:prstGeom prst="line">
             <a:avLst/>
@@ -17567,7 +17567,7 @@
         </p:nvSpPr>
         <p:spPr>
           <a:xfrm>
-            <a:off x="10084201" y="2964732"/>
+            <a:off x="10114262" y="2912665"/>
             <a:ext cx="548640" cy="365760"/>
           </a:xfrm>
           <a:prstGeom prst="rect">
@@ -17606,7 +17606,7 @@
         </p:nvSpPr>
         <p:spPr>
           <a:xfrm>
-            <a:off x="10409892" y="3290423"/>
+            <a:off x="10461959" y="3260362"/>
             <a:ext cx="548640" cy="365760"/>
           </a:xfrm>
           <a:prstGeom prst="rect">
@@ -17645,7 +17645,7 @@
         </p:nvSpPr>
         <p:spPr>
           <a:xfrm>
-            <a:off x="10529103" y="3735324"/>
+            <a:off x="10589224" y="3735324"/>
             <a:ext cx="548640" cy="365760"/>
           </a:xfrm>
           <a:prstGeom prst="rect">
@@ -17684,7 +17684,7 @@
         </p:nvSpPr>
         <p:spPr>
           <a:xfrm>
-            <a:off x="10409892" y="4180225"/>
+            <a:off x="10461959" y="4210286"/>
             <a:ext cx="548640" cy="365760"/>
           </a:xfrm>
           <a:prstGeom prst="rect">
@@ -17723,7 +17723,7 @@
         </p:nvSpPr>
         <p:spPr>
           <a:xfrm>
-            <a:off x="10084201" y="4505916"/>
+            <a:off x="10114262" y="4557983"/>
             <a:ext cx="548640" cy="365760"/>
           </a:xfrm>
           <a:prstGeom prst="rect">
@@ -17762,7 +17762,7 @@
         </p:nvSpPr>
         <p:spPr>
           <a:xfrm>
-            <a:off x="9639300" y="4625127"/>
+            <a:off x="9639300" y="4685248"/>
             <a:ext cx="548640" cy="365760"/>
           </a:xfrm>
           <a:prstGeom prst="rect">
@@ -17801,7 +17801,7 @@
         </p:nvSpPr>
         <p:spPr>
           <a:xfrm>
-            <a:off x="9194399" y="4505916"/>
+            <a:off x="9164338" y="4557983"/>
             <a:ext cx="548640" cy="365760"/>
           </a:xfrm>
           <a:prstGeom prst="rect">
@@ -17840,7 +17840,7 @@
         </p:nvSpPr>
         <p:spPr>
           <a:xfrm>
-            <a:off x="8868708" y="4180225"/>
+            <a:off x="8816641" y="4210286"/>
             <a:ext cx="548640" cy="365760"/>
           </a:xfrm>
           <a:prstGeom prst="rect">
@@ -17879,7 +17879,7 @@
         </p:nvSpPr>
         <p:spPr>
           <a:xfrm>
-            <a:off x="8749497" y="3735324"/>
+            <a:off x="8689376" y="3735324"/>
             <a:ext cx="548640" cy="365760"/>
           </a:xfrm>
           <a:prstGeom prst="rect">
@@ -17918,7 +17918,7 @@
         </p:nvSpPr>
         <p:spPr>
           <a:xfrm>
-            <a:off x="8868708" y="3290423"/>
+            <a:off x="8816641" y="3260362"/>
             <a:ext cx="548640" cy="365760"/>
           </a:xfrm>
           <a:prstGeom prst="rect">
@@ -17957,7 +17957,7 @@
         </p:nvSpPr>
         <p:spPr>
           <a:xfrm>
-            <a:off x="9194399" y="2964732"/>
+            <a:off x="9164338" y="2912665"/>
             <a:ext cx="548640" cy="365760"/>
           </a:xfrm>
           <a:prstGeom prst="rect">
@@ -17996,7 +17996,7 @@
         </p:nvSpPr>
         <p:spPr>
           <a:xfrm>
-            <a:off x="9639300" y="2845521"/>
+            <a:off x="9639300" y="2785400"/>
             <a:ext cx="548640" cy="365760"/>
           </a:xfrm>
           <a:prstGeom prst="rect">
@@ -18036,7 +18036,7 @@
         <p:spPr>
           <a:xfrm>
             <a:off x="9913620" y="3918204"/>
-            <a:ext cx="601218" cy="0"/>
+            <a:ext cx="529072" cy="0"/>
           </a:xfrm>
           <a:prstGeom prst="line">
             <a:avLst/>
@@ -18058,8 +18058,8 @@
         </p:nvSpPr>
         <p:spPr>
           <a:xfrm flipV="1">
-            <a:off x="9913620" y="2980304"/>
-            <a:ext cx="0" cy="937900"/>
+            <a:off x="9913620" y="3148645"/>
+            <a:ext cx="0" cy="769559"/>
           </a:xfrm>
           <a:prstGeom prst="line">
             <a:avLst/>
@@ -20217,7 +20217,7 @@
         </p:nvSpPr>
         <p:spPr>
           <a:xfrm>
-            <a:off x="3542386" y="1784717"/>
+            <a:off x="3581248" y="1717406"/>
             <a:ext cx="548640" cy="365760"/>
           </a:xfrm>
           <a:prstGeom prst="rect">
@@ -20256,7 +20256,7 @@
         </p:nvSpPr>
         <p:spPr>
           <a:xfrm>
-            <a:off x="3963430" y="2205761"/>
+            <a:off x="4030741" y="2166899"/>
             <a:ext cx="548640" cy="365760"/>
           </a:xfrm>
           <a:prstGeom prst="rect">
@@ -20295,7 +20295,7 @@
         </p:nvSpPr>
         <p:spPr>
           <a:xfrm>
-            <a:off x="4117543" y="2780919"/>
+            <a:off x="4195267" y="2780919"/>
             <a:ext cx="548640" cy="365760"/>
           </a:xfrm>
           <a:prstGeom prst="rect">
@@ -20334,7 +20334,7 @@
         </p:nvSpPr>
         <p:spPr>
           <a:xfrm>
-            <a:off x="3963430" y="3356077"/>
+            <a:off x="4030741" y="3394939"/>
             <a:ext cx="548640" cy="365760"/>
           </a:xfrm>
           <a:prstGeom prst="rect">
@@ -20373,7 +20373,7 @@
         </p:nvSpPr>
         <p:spPr>
           <a:xfrm>
-            <a:off x="3542386" y="3777121"/>
+            <a:off x="3581248" y="3844432"/>
             <a:ext cx="548640" cy="365760"/>
           </a:xfrm>
           <a:prstGeom prst="rect">
@@ -20412,7 +20412,7 @@
         </p:nvSpPr>
         <p:spPr>
           <a:xfrm>
-            <a:off x="2967228" y="3931234"/>
+            <a:off x="2967228" y="4008958"/>
             <a:ext cx="548640" cy="365760"/>
           </a:xfrm>
           <a:prstGeom prst="rect">
@@ -20451,7 +20451,7 @@
         </p:nvSpPr>
         <p:spPr>
           <a:xfrm>
-            <a:off x="2392070" y="3777121"/>
+            <a:off x="2353208" y="3844432"/>
             <a:ext cx="548640" cy="365760"/>
           </a:xfrm>
           <a:prstGeom prst="rect">
@@ -20490,7 +20490,7 @@
         </p:nvSpPr>
         <p:spPr>
           <a:xfrm>
-            <a:off x="1971026" y="3356077"/>
+            <a:off x="1903715" y="3394939"/>
             <a:ext cx="548640" cy="365760"/>
           </a:xfrm>
           <a:prstGeom prst="rect">
@@ -20529,7 +20529,7 @@
         </p:nvSpPr>
         <p:spPr>
           <a:xfrm>
-            <a:off x="1816913" y="2780919"/>
+            <a:off x="1739189" y="2780919"/>
             <a:ext cx="548640" cy="365760"/>
           </a:xfrm>
           <a:prstGeom prst="rect">
@@ -20568,7 +20568,7 @@
         </p:nvSpPr>
         <p:spPr>
           <a:xfrm>
-            <a:off x="1971026" y="2205761"/>
+            <a:off x="1903715" y="2166899"/>
             <a:ext cx="548640" cy="365760"/>
           </a:xfrm>
           <a:prstGeom prst="rect">
@@ -20607,7 +20607,7 @@
         </p:nvSpPr>
         <p:spPr>
           <a:xfrm>
-            <a:off x="2392070" y="1784717"/>
+            <a:off x="2353208" y="1717406"/>
             <a:ext cx="548640" cy="365760"/>
           </a:xfrm>
           <a:prstGeom prst="rect">
@@ -20646,7 +20646,7 @@
         </p:nvSpPr>
         <p:spPr>
           <a:xfrm>
-            <a:off x="2967228" y="1630604"/>
+            <a:off x="2967228" y="1552880"/>
             <a:ext cx="548640" cy="365760"/>
           </a:xfrm>
           <a:prstGeom prst="rect">
@@ -20686,7 +20686,7 @@
         <p:spPr>
           <a:xfrm>
             <a:off x="3241548" y="2963799"/>
-            <a:ext cx="777240" cy="0"/>
+            <a:ext cx="683971" cy="0"/>
           </a:xfrm>
           <a:prstGeom prst="line">
             <a:avLst/>
@@ -20708,8 +20708,8 @@
         </p:nvSpPr>
         <p:spPr>
           <a:xfrm flipV="1">
-            <a:off x="3241548" y="1751305"/>
-            <a:ext cx="0" cy="1212494"/>
+            <a:off x="3241548" y="1968932"/>
+            <a:ext cx="0" cy="994867"/>
           </a:xfrm>
           <a:prstGeom prst="line">
             <a:avLst/>
@@ -22200,7 +22200,7 @@
         </p:nvSpPr>
         <p:spPr>
           <a:xfrm>
-            <a:off x="9248242" y="1784717"/>
+            <a:off x="9287104" y="1717406"/>
             <a:ext cx="548640" cy="365760"/>
           </a:xfrm>
           <a:prstGeom prst="rect">
@@ -22239,7 +22239,7 @@
         </p:nvSpPr>
         <p:spPr>
           <a:xfrm>
-            <a:off x="9669286" y="2205761"/>
+            <a:off x="9736597" y="2166899"/>
             <a:ext cx="548640" cy="365760"/>
           </a:xfrm>
           <a:prstGeom prst="rect">
@@ -22278,7 +22278,7 @@
         </p:nvSpPr>
         <p:spPr>
           <a:xfrm>
-            <a:off x="9823399" y="2780919"/>
+            <a:off x="9901123" y="2780919"/>
             <a:ext cx="548640" cy="365760"/>
           </a:xfrm>
           <a:prstGeom prst="rect">
@@ -22317,7 +22317,7 @@
         </p:nvSpPr>
         <p:spPr>
           <a:xfrm>
-            <a:off x="9669286" y="3356077"/>
+            <a:off x="9736597" y="3394939"/>
             <a:ext cx="548640" cy="365760"/>
           </a:xfrm>
           <a:prstGeom prst="rect">
@@ -22356,7 +22356,7 @@
         </p:nvSpPr>
         <p:spPr>
           <a:xfrm>
-            <a:off x="9248242" y="3777121"/>
+            <a:off x="9287104" y="3844432"/>
             <a:ext cx="548640" cy="365760"/>
           </a:xfrm>
           <a:prstGeom prst="rect">
@@ -22395,7 +22395,7 @@
         </p:nvSpPr>
         <p:spPr>
           <a:xfrm>
-            <a:off x="8673084" y="3931234"/>
+            <a:off x="8673084" y="4008958"/>
             <a:ext cx="548640" cy="365760"/>
           </a:xfrm>
           <a:prstGeom prst="rect">
@@ -22434,7 +22434,7 @@
         </p:nvSpPr>
         <p:spPr>
           <a:xfrm>
-            <a:off x="8097926" y="3777121"/>
+            <a:off x="8059064" y="3844432"/>
             <a:ext cx="548640" cy="365760"/>
           </a:xfrm>
           <a:prstGeom prst="rect">
@@ -22473,7 +22473,7 @@
         </p:nvSpPr>
         <p:spPr>
           <a:xfrm>
-            <a:off x="7676882" y="3356077"/>
+            <a:off x="7609571" y="3394939"/>
             <a:ext cx="548640" cy="365760"/>
           </a:xfrm>
           <a:prstGeom prst="rect">
@@ -22512,7 +22512,7 @@
         </p:nvSpPr>
         <p:spPr>
           <a:xfrm>
-            <a:off x="7522769" y="2780919"/>
+            <a:off x="7445045" y="2780919"/>
             <a:ext cx="548640" cy="365760"/>
           </a:xfrm>
           <a:prstGeom prst="rect">
@@ -22551,7 +22551,7 @@
         </p:nvSpPr>
         <p:spPr>
           <a:xfrm>
-            <a:off x="7676882" y="2205761"/>
+            <a:off x="7609571" y="2166899"/>
             <a:ext cx="548640" cy="365760"/>
           </a:xfrm>
           <a:prstGeom prst="rect">
@@ -22590,7 +22590,7 @@
         </p:nvSpPr>
         <p:spPr>
           <a:xfrm>
-            <a:off x="8097926" y="1784717"/>
+            <a:off x="8059064" y="1717406"/>
             <a:ext cx="548640" cy="365760"/>
           </a:xfrm>
           <a:prstGeom prst="rect">
@@ -22629,7 +22629,7 @@
         </p:nvSpPr>
         <p:spPr>
           <a:xfrm>
-            <a:off x="8673084" y="1630604"/>
+            <a:off x="8673084" y="1552880"/>
             <a:ext cx="548640" cy="365760"/>
           </a:xfrm>
           <a:prstGeom prst="rect">
@@ -22669,7 +22669,7 @@
         <p:spPr>
           <a:xfrm>
             <a:off x="8947404" y="2963799"/>
-            <a:ext cx="750756" cy="201165"/>
+            <a:ext cx="660665" cy="177025"/>
           </a:xfrm>
           <a:prstGeom prst="line">
             <a:avLst/>
@@ -22692,7 +22692,7 @@
         <p:spPr>
           <a:xfrm>
             <a:off x="8947404" y="2963799"/>
-            <a:ext cx="0" cy="1212494"/>
+            <a:ext cx="0" cy="994867"/>
           </a:xfrm>
           <a:prstGeom prst="line">
             <a:avLst/>
@@ -22892,7 +22892,7 @@
         </p:nvSpPr>
         <p:spPr>
           <a:xfrm>
-            <a:off x="548640" y="1773936"/>
+            <a:off x="548640" y="2219706"/>
             <a:ext cx="566928" cy="566928"/>
           </a:xfrm>
           <a:prstGeom prst="roundRect">
@@ -22939,8 +22939,8 @@
         </p:nvSpPr>
         <p:spPr>
           <a:xfrm>
-            <a:off x="2715768" y="1325880"/>
-            <a:ext cx="1463040" cy="1463040"/>
+            <a:off x="2450592" y="1325880"/>
+            <a:ext cx="2354580" cy="2354580"/>
           </a:xfrm>
           <a:prstGeom prst="ellipse">
             <a:avLst/>
@@ -22964,8 +22964,8 @@
         </p:nvSpPr>
         <p:spPr>
           <a:xfrm>
-            <a:off x="3447288" y="1362456"/>
-            <a:ext cx="0" cy="80467"/>
+            <a:off x="3627882" y="1362456"/>
+            <a:ext cx="0" cy="129502"/>
           </a:xfrm>
           <a:prstGeom prst="line">
             <a:avLst/>
@@ -22987,8 +22987,8 @@
         </p:nvSpPr>
         <p:spPr>
           <a:xfrm flipH="1">
-            <a:off x="3516106" y="1366263"/>
-            <a:ext cx="3823" cy="36376"/>
+            <a:off x="3740966" y="1368705"/>
+            <a:ext cx="6153" cy="58542"/>
           </a:xfrm>
           <a:prstGeom prst="line">
             <a:avLst/>
@@ -23010,8 +23010,8 @@
         </p:nvSpPr>
         <p:spPr>
           <a:xfrm flipH="1">
-            <a:off x="3584170" y="1377642"/>
-            <a:ext cx="7605" cy="35777"/>
+            <a:off x="3852811" y="1387383"/>
+            <a:ext cx="12239" cy="57578"/>
           </a:xfrm>
           <a:prstGeom prst="line">
             <a:avLst/>
@@ -23033,8 +23033,8 @@
         </p:nvSpPr>
         <p:spPr>
           <a:xfrm flipH="1">
-            <a:off x="3650735" y="1396469"/>
-            <a:ext cx="11303" cy="34786"/>
+            <a:off x="3962192" y="1418287"/>
+            <a:ext cx="18190" cy="55983"/>
           </a:xfrm>
           <a:prstGeom prst="line">
             <a:avLst/>
@@ -23056,8 +23056,8 @@
         </p:nvSpPr>
         <p:spPr>
           <a:xfrm flipH="1">
-            <a:off x="3715070" y="1422537"/>
-            <a:ext cx="14877" cy="33414"/>
+            <a:off x="4067910" y="1461076"/>
+            <a:ext cx="23942" cy="53775"/>
           </a:xfrm>
           <a:prstGeom prst="line">
             <a:avLst/>
@@ -23079,8 +23079,8 @@
         </p:nvSpPr>
         <p:spPr>
           <a:xfrm flipH="1">
-            <a:off x="3754526" y="1455561"/>
-            <a:ext cx="40234" cy="69687"/>
+            <a:off x="4133488" y="1515283"/>
+            <a:ext cx="64751" cy="112152"/>
           </a:xfrm>
           <a:prstGeom prst="line">
             <a:avLst/>
@@ -23102,8 +23102,8 @@
         </p:nvSpPr>
         <p:spPr>
           <a:xfrm flipH="1">
-            <a:off x="3834267" y="1495178"/>
-            <a:ext cx="21499" cy="29591"/>
+            <a:off x="4263777" y="1580313"/>
+            <a:ext cx="34600" cy="47622"/>
           </a:xfrm>
           <a:prstGeom prst="line">
             <a:avLst/>
@@ -23125,8 +23125,8 @@
         </p:nvSpPr>
         <p:spPr>
           <a:xfrm flipH="1">
-            <a:off x="3887822" y="1540956"/>
-            <a:ext cx="24474" cy="27181"/>
+            <a:off x="4351781" y="1655454"/>
+            <a:ext cx="39388" cy="43745"/>
           </a:xfrm>
           <a:prstGeom prst="line">
             <a:avLst/>
@@ -23148,8 +23148,8 @@
         </p:nvSpPr>
         <p:spPr>
           <a:xfrm flipH="1">
-            <a:off x="3936551" y="1592392"/>
-            <a:ext cx="27181" cy="24474"/>
+            <a:off x="4431853" y="1739883"/>
+            <a:ext cx="43745" cy="39388"/>
           </a:xfrm>
           <a:prstGeom prst="line">
             <a:avLst/>
@@ -23171,8 +23171,8 @@
         </p:nvSpPr>
         <p:spPr>
           <a:xfrm flipH="1">
-            <a:off x="3979919" y="1648922"/>
-            <a:ext cx="29591" cy="21499"/>
+            <a:off x="4503117" y="1832675"/>
+            <a:ext cx="47622" cy="34600"/>
           </a:xfrm>
           <a:prstGeom prst="line">
             <a:avLst/>
@@ -23194,8 +23194,8 @@
         </p:nvSpPr>
         <p:spPr>
           <a:xfrm flipH="1">
-            <a:off x="3979441" y="1709928"/>
-            <a:ext cx="69687" cy="40234"/>
+            <a:off x="4503617" y="1932813"/>
+            <a:ext cx="112152" cy="64751"/>
           </a:xfrm>
           <a:prstGeom prst="line">
             <a:avLst/>
@@ -23217,8 +23217,8 @@
         </p:nvSpPr>
         <p:spPr>
           <a:xfrm flipH="1">
-            <a:off x="4048737" y="1774741"/>
-            <a:ext cx="33414" cy="14877"/>
+            <a:off x="4616201" y="2039200"/>
+            <a:ext cx="53775" cy="23942"/>
           </a:xfrm>
           <a:prstGeom prst="line">
             <a:avLst/>
@@ -23240,8 +23240,8 @@
         </p:nvSpPr>
         <p:spPr>
           <a:xfrm flipH="1">
-            <a:off x="4073433" y="1842650"/>
-            <a:ext cx="34786" cy="11303"/>
+            <a:off x="4656782" y="2150670"/>
+            <a:ext cx="55983" cy="18190"/>
           </a:xfrm>
           <a:prstGeom prst="line">
             <a:avLst/>
@@ -23263,8 +23263,8 @@
         </p:nvSpPr>
         <p:spPr>
           <a:xfrm flipH="1">
-            <a:off x="4091269" y="1912913"/>
-            <a:ext cx="35777" cy="7605"/>
+            <a:off x="4686090" y="2266002"/>
+            <a:ext cx="57578" cy="12239"/>
           </a:xfrm>
           <a:prstGeom prst="line">
             <a:avLst/>
@@ -23286,8 +23286,8 @@
         </p:nvSpPr>
         <p:spPr>
           <a:xfrm flipH="1">
-            <a:off x="4102049" y="1984759"/>
-            <a:ext cx="36376" cy="3823"/>
+            <a:off x="4703805" y="2383933"/>
+            <a:ext cx="58542" cy="6153"/>
           </a:xfrm>
           <a:prstGeom prst="line">
             <a:avLst/>
@@ -23309,8 +23309,8 @@
         </p:nvSpPr>
         <p:spPr>
           <a:xfrm flipH="1">
-            <a:off x="4061765" y="2057400"/>
-            <a:ext cx="80467" cy="0"/>
+            <a:off x="4639094" y="2503170"/>
+            <a:ext cx="129502" cy="0"/>
           </a:xfrm>
           <a:prstGeom prst="line">
             <a:avLst/>
@@ -23332,8 +23332,8 @@
         </p:nvSpPr>
         <p:spPr>
           <a:xfrm flipH="1" flipV="1">
-            <a:off x="4102049" y="2126218"/>
-            <a:ext cx="36376" cy="3823"/>
+            <a:off x="4703805" y="2616254"/>
+            <a:ext cx="58542" cy="6153"/>
           </a:xfrm>
           <a:prstGeom prst="line">
             <a:avLst/>
@@ -23355,8 +23355,8 @@
         </p:nvSpPr>
         <p:spPr>
           <a:xfrm flipH="1" flipV="1">
-            <a:off x="4091269" y="2194282"/>
-            <a:ext cx="35777" cy="7605"/>
+            <a:off x="4686090" y="2728099"/>
+            <a:ext cx="57578" cy="12239"/>
           </a:xfrm>
           <a:prstGeom prst="line">
             <a:avLst/>
@@ -23378,8 +23378,8 @@
         </p:nvSpPr>
         <p:spPr>
           <a:xfrm flipH="1" flipV="1">
-            <a:off x="4073433" y="2260847"/>
-            <a:ext cx="34786" cy="11303"/>
+            <a:off x="4656782" y="2837480"/>
+            <a:ext cx="55983" cy="18190"/>
           </a:xfrm>
           <a:prstGeom prst="line">
             <a:avLst/>
@@ -23401,8 +23401,8 @@
         </p:nvSpPr>
         <p:spPr>
           <a:xfrm flipH="1" flipV="1">
-            <a:off x="4048737" y="2325182"/>
-            <a:ext cx="33414" cy="14877"/>
+            <a:off x="4616201" y="2943198"/>
+            <a:ext cx="53775" cy="23942"/>
           </a:xfrm>
           <a:prstGeom prst="line">
             <a:avLst/>
@@ -23424,8 +23424,8 @@
         </p:nvSpPr>
         <p:spPr>
           <a:xfrm flipH="1" flipV="1">
-            <a:off x="3979441" y="2364638"/>
-            <a:ext cx="69687" cy="40234"/>
+            <a:off x="4503617" y="3008776"/>
+            <a:ext cx="112152" cy="64751"/>
           </a:xfrm>
           <a:prstGeom prst="line">
             <a:avLst/>
@@ -23447,8 +23447,8 @@
         </p:nvSpPr>
         <p:spPr>
           <a:xfrm flipH="1" flipV="1">
-            <a:off x="3979919" y="2444379"/>
-            <a:ext cx="29591" cy="21499"/>
+            <a:off x="4503117" y="3139065"/>
+            <a:ext cx="47622" cy="34600"/>
           </a:xfrm>
           <a:prstGeom prst="line">
             <a:avLst/>
@@ -23470,8 +23470,8 @@
         </p:nvSpPr>
         <p:spPr>
           <a:xfrm flipH="1" flipV="1">
-            <a:off x="3936551" y="2497934"/>
-            <a:ext cx="27181" cy="24474"/>
+            <a:off x="4431853" y="3227069"/>
+            <a:ext cx="43745" cy="39388"/>
           </a:xfrm>
           <a:prstGeom prst="line">
             <a:avLst/>
@@ -23493,8 +23493,8 @@
         </p:nvSpPr>
         <p:spPr>
           <a:xfrm flipH="1" flipV="1">
-            <a:off x="3887822" y="2546663"/>
-            <a:ext cx="24474" cy="27181"/>
+            <a:off x="4351781" y="3307141"/>
+            <a:ext cx="39388" cy="43745"/>
           </a:xfrm>
           <a:prstGeom prst="line">
             <a:avLst/>
@@ -23516,8 +23516,8 @@
         </p:nvSpPr>
         <p:spPr>
           <a:xfrm flipH="1" flipV="1">
-            <a:off x="3834267" y="2590031"/>
-            <a:ext cx="21499" cy="29591"/>
+            <a:off x="4263777" y="3378405"/>
+            <a:ext cx="34600" cy="47622"/>
           </a:xfrm>
           <a:prstGeom prst="line">
             <a:avLst/>
@@ -23539,8 +23539,8 @@
         </p:nvSpPr>
         <p:spPr>
           <a:xfrm flipH="1" flipV="1">
-            <a:off x="3754526" y="2589553"/>
-            <a:ext cx="40234" cy="69687"/>
+            <a:off x="4133488" y="3378905"/>
+            <a:ext cx="64751" cy="112152"/>
           </a:xfrm>
           <a:prstGeom prst="line">
             <a:avLst/>
@@ -23562,8 +23562,8 @@
         </p:nvSpPr>
         <p:spPr>
           <a:xfrm flipH="1" flipV="1">
-            <a:off x="3715070" y="2658849"/>
-            <a:ext cx="14877" cy="33414"/>
+            <a:off x="4067910" y="3491489"/>
+            <a:ext cx="23942" cy="53775"/>
           </a:xfrm>
           <a:prstGeom prst="line">
             <a:avLst/>
@@ -23585,8 +23585,8 @@
         </p:nvSpPr>
         <p:spPr>
           <a:xfrm flipH="1" flipV="1">
-            <a:off x="3650735" y="2683545"/>
-            <a:ext cx="11303" cy="34786"/>
+            <a:off x="3962192" y="3532070"/>
+            <a:ext cx="18190" cy="55983"/>
           </a:xfrm>
           <a:prstGeom prst="line">
             <a:avLst/>
@@ -23608,8 +23608,8 @@
         </p:nvSpPr>
         <p:spPr>
           <a:xfrm flipH="1" flipV="1">
-            <a:off x="3584170" y="2701381"/>
-            <a:ext cx="7605" cy="35777"/>
+            <a:off x="3852811" y="3561378"/>
+            <a:ext cx="12239" cy="57578"/>
           </a:xfrm>
           <a:prstGeom prst="line">
             <a:avLst/>
@@ -23631,8 +23631,8 @@
         </p:nvSpPr>
         <p:spPr>
           <a:xfrm flipH="1" flipV="1">
-            <a:off x="3516106" y="2712161"/>
-            <a:ext cx="3823" cy="36376"/>
+            <a:off x="3740966" y="3579093"/>
+            <a:ext cx="6153" cy="58542"/>
           </a:xfrm>
           <a:prstGeom prst="line">
             <a:avLst/>
@@ -23654,8 +23654,8 @@
         </p:nvSpPr>
         <p:spPr>
           <a:xfrm flipV="1">
-            <a:off x="3447288" y="2671877"/>
-            <a:ext cx="0" cy="80467"/>
+            <a:off x="3627882" y="3514382"/>
+            <a:ext cx="0" cy="129502"/>
           </a:xfrm>
           <a:prstGeom prst="line">
             <a:avLst/>
@@ -23677,8 +23677,8 @@
         </p:nvSpPr>
         <p:spPr>
           <a:xfrm flipV="1">
-            <a:off x="3374647" y="2712161"/>
-            <a:ext cx="3823" cy="36376"/>
+            <a:off x="3508645" y="3579093"/>
+            <a:ext cx="6153" cy="58542"/>
           </a:xfrm>
           <a:prstGeom prst="line">
             <a:avLst/>
@@ -23700,8 +23700,8 @@
         </p:nvSpPr>
         <p:spPr>
           <a:xfrm flipV="1">
-            <a:off x="3302801" y="2701381"/>
-            <a:ext cx="7605" cy="35777"/>
+            <a:off x="3390714" y="3561378"/>
+            <a:ext cx="12239" cy="57578"/>
           </a:xfrm>
           <a:prstGeom prst="line">
             <a:avLst/>
@@ -23723,8 +23723,8 @@
         </p:nvSpPr>
         <p:spPr>
           <a:xfrm flipV="1">
-            <a:off x="3232538" y="2683545"/>
-            <a:ext cx="11303" cy="34786"/>
+            <a:off x="3275382" y="3532070"/>
+            <a:ext cx="18190" cy="55983"/>
           </a:xfrm>
           <a:prstGeom prst="line">
             <a:avLst/>
@@ -23746,8 +23746,8 @@
         </p:nvSpPr>
         <p:spPr>
           <a:xfrm flipV="1">
-            <a:off x="3164629" y="2658849"/>
-            <a:ext cx="14877" cy="33414"/>
+            <a:off x="3163912" y="3491489"/>
+            <a:ext cx="23942" cy="53775"/>
           </a:xfrm>
           <a:prstGeom prst="line">
             <a:avLst/>
@@ -23769,8 +23769,8 @@
         </p:nvSpPr>
         <p:spPr>
           <a:xfrm flipV="1">
-            <a:off x="3099816" y="2589553"/>
-            <a:ext cx="40234" cy="69687"/>
+            <a:off x="3057525" y="3378905"/>
+            <a:ext cx="64751" cy="112152"/>
           </a:xfrm>
           <a:prstGeom prst="line">
             <a:avLst/>
@@ -23792,8 +23792,8 @@
         </p:nvSpPr>
         <p:spPr>
           <a:xfrm flipV="1">
-            <a:off x="3038810" y="2590031"/>
-            <a:ext cx="21499" cy="29591"/>
+            <a:off x="2957387" y="3378405"/>
+            <a:ext cx="34600" cy="47622"/>
           </a:xfrm>
           <a:prstGeom prst="line">
             <a:avLst/>
@@ -23815,8 +23815,8 @@
         </p:nvSpPr>
         <p:spPr>
           <a:xfrm flipV="1">
-            <a:off x="2982280" y="2546663"/>
-            <a:ext cx="24474" cy="27181"/>
+            <a:off x="2864595" y="3307141"/>
+            <a:ext cx="39388" cy="43745"/>
           </a:xfrm>
           <a:prstGeom prst="line">
             <a:avLst/>
@@ -23838,8 +23838,8 @@
         </p:nvSpPr>
         <p:spPr>
           <a:xfrm flipV="1">
-            <a:off x="2930844" y="2497934"/>
-            <a:ext cx="27181" cy="24474"/>
+            <a:off x="2780166" y="3227069"/>
+            <a:ext cx="43745" cy="39388"/>
           </a:xfrm>
           <a:prstGeom prst="line">
             <a:avLst/>
@@ -23861,8 +23861,8 @@
         </p:nvSpPr>
         <p:spPr>
           <a:xfrm flipV="1">
-            <a:off x="2885066" y="2444379"/>
-            <a:ext cx="29591" cy="21499"/>
+            <a:off x="2705025" y="3139065"/>
+            <a:ext cx="47622" cy="34600"/>
           </a:xfrm>
           <a:prstGeom prst="line">
             <a:avLst/>
@@ -23884,8 +23884,8 @@
         </p:nvSpPr>
         <p:spPr>
           <a:xfrm flipV="1">
-            <a:off x="2845449" y="2364638"/>
-            <a:ext cx="69687" cy="40234"/>
+            <a:off x="2639995" y="3008776"/>
+            <a:ext cx="112152" cy="64751"/>
           </a:xfrm>
           <a:prstGeom prst="line">
             <a:avLst/>
@@ -23907,8 +23907,8 @@
         </p:nvSpPr>
         <p:spPr>
           <a:xfrm flipV="1">
-            <a:off x="2812425" y="2325182"/>
-            <a:ext cx="33414" cy="14877"/>
+            <a:off x="2585788" y="2943198"/>
+            <a:ext cx="53775" cy="23942"/>
           </a:xfrm>
           <a:prstGeom prst="line">
             <a:avLst/>
@@ -23930,8 +23930,8 @@
         </p:nvSpPr>
         <p:spPr>
           <a:xfrm flipV="1">
-            <a:off x="2786357" y="2260847"/>
-            <a:ext cx="34786" cy="11303"/>
+            <a:off x="2542999" y="2837480"/>
+            <a:ext cx="55983" cy="18190"/>
           </a:xfrm>
           <a:prstGeom prst="line">
             <a:avLst/>
@@ -23953,8 +23953,8 @@
         </p:nvSpPr>
         <p:spPr>
           <a:xfrm flipV="1">
-            <a:off x="2767530" y="2194282"/>
-            <a:ext cx="35777" cy="7605"/>
+            <a:off x="2512095" y="2728099"/>
+            <a:ext cx="57578" cy="12239"/>
           </a:xfrm>
           <a:prstGeom prst="line">
             <a:avLst/>
@@ -23976,8 +23976,8 @@
         </p:nvSpPr>
         <p:spPr>
           <a:xfrm flipV="1">
-            <a:off x="2756151" y="2126218"/>
-            <a:ext cx="36376" cy="3823"/>
+            <a:off x="2493417" y="2616254"/>
+            <a:ext cx="58542" cy="6153"/>
           </a:xfrm>
           <a:prstGeom prst="line">
             <a:avLst/>
@@ -23998,9 +23998,9 @@
           <p:nvPr/>
         </p:nvSpPr>
         <p:spPr>
-          <a:xfrm>
-            <a:off x="2752344" y="2057400"/>
-            <a:ext cx="80467" cy="0"/>
+          <a:xfrm flipV="1">
+            <a:off x="2487168" y="2503170"/>
+            <a:ext cx="129502" cy="0"/>
           </a:xfrm>
           <a:prstGeom prst="line">
             <a:avLst/>
@@ -24022,8 +24022,8 @@
         </p:nvSpPr>
         <p:spPr>
           <a:xfrm>
-            <a:off x="2756151" y="1984759"/>
-            <a:ext cx="36376" cy="3823"/>
+            <a:off x="2493417" y="2383933"/>
+            <a:ext cx="58542" cy="6153"/>
           </a:xfrm>
           <a:prstGeom prst="line">
             <a:avLst/>
@@ -24045,8 +24045,8 @@
         </p:nvSpPr>
         <p:spPr>
           <a:xfrm>
-            <a:off x="2767530" y="1912913"/>
-            <a:ext cx="35777" cy="7605"/>
+            <a:off x="2512095" y="2266002"/>
+            <a:ext cx="57578" cy="12239"/>
           </a:xfrm>
           <a:prstGeom prst="line">
             <a:avLst/>
@@ -24068,8 +24068,8 @@
         </p:nvSpPr>
         <p:spPr>
           <a:xfrm>
-            <a:off x="2786357" y="1842650"/>
-            <a:ext cx="34786" cy="11303"/>
+            <a:off x="2542999" y="2150670"/>
+            <a:ext cx="55983" cy="18190"/>
           </a:xfrm>
           <a:prstGeom prst="line">
             <a:avLst/>
@@ -24091,8 +24091,8 @@
         </p:nvSpPr>
         <p:spPr>
           <a:xfrm>
-            <a:off x="2812425" y="1774741"/>
-            <a:ext cx="33414" cy="14877"/>
+            <a:off x="2585788" y="2039200"/>
+            <a:ext cx="53775" cy="23942"/>
           </a:xfrm>
           <a:prstGeom prst="line">
             <a:avLst/>
@@ -24114,8 +24114,8 @@
         </p:nvSpPr>
         <p:spPr>
           <a:xfrm>
-            <a:off x="2845449" y="1709928"/>
-            <a:ext cx="69687" cy="40234"/>
+            <a:off x="2639995" y="1932813"/>
+            <a:ext cx="112152" cy="64751"/>
           </a:xfrm>
           <a:prstGeom prst="line">
             <a:avLst/>
@@ -24137,8 +24137,8 @@
         </p:nvSpPr>
         <p:spPr>
           <a:xfrm>
-            <a:off x="2885066" y="1648922"/>
-            <a:ext cx="29591" cy="21499"/>
+            <a:off x="2705025" y="1832675"/>
+            <a:ext cx="47622" cy="34600"/>
           </a:xfrm>
           <a:prstGeom prst="line">
             <a:avLst/>
@@ -24160,8 +24160,8 @@
         </p:nvSpPr>
         <p:spPr>
           <a:xfrm>
-            <a:off x="2930844" y="1592392"/>
-            <a:ext cx="27181" cy="24474"/>
+            <a:off x="2780166" y="1739883"/>
+            <a:ext cx="43745" cy="39388"/>
           </a:xfrm>
           <a:prstGeom prst="line">
             <a:avLst/>
@@ -24183,8 +24183,8 @@
         </p:nvSpPr>
         <p:spPr>
           <a:xfrm>
-            <a:off x="2982280" y="1540956"/>
-            <a:ext cx="24474" cy="27181"/>
+            <a:off x="2864595" y="1655454"/>
+            <a:ext cx="39388" cy="43745"/>
           </a:xfrm>
           <a:prstGeom prst="line">
             <a:avLst/>
@@ -24206,8 +24206,8 @@
         </p:nvSpPr>
         <p:spPr>
           <a:xfrm>
-            <a:off x="3038810" y="1495178"/>
-            <a:ext cx="21499" cy="29591"/>
+            <a:off x="2957387" y="1580313"/>
+            <a:ext cx="34600" cy="47622"/>
           </a:xfrm>
           <a:prstGeom prst="line">
             <a:avLst/>
@@ -24229,8 +24229,8 @@
         </p:nvSpPr>
         <p:spPr>
           <a:xfrm>
-            <a:off x="3099816" y="1455561"/>
-            <a:ext cx="40234" cy="69687"/>
+            <a:off x="3057525" y="1515283"/>
+            <a:ext cx="64751" cy="112152"/>
           </a:xfrm>
           <a:prstGeom prst="line">
             <a:avLst/>
@@ -24252,8 +24252,8 @@
         </p:nvSpPr>
         <p:spPr>
           <a:xfrm>
-            <a:off x="3164629" y="1422537"/>
-            <a:ext cx="14877" cy="33414"/>
+            <a:off x="3163912" y="1461076"/>
+            <a:ext cx="23942" cy="53775"/>
           </a:xfrm>
           <a:prstGeom prst="line">
             <a:avLst/>
@@ -24275,8 +24275,8 @@
         </p:nvSpPr>
         <p:spPr>
           <a:xfrm>
-            <a:off x="3232538" y="1396469"/>
-            <a:ext cx="11303" cy="34786"/>
+            <a:off x="3275382" y="1418287"/>
+            <a:ext cx="18190" cy="55983"/>
           </a:xfrm>
           <a:prstGeom prst="line">
             <a:avLst/>
@@ -24298,8 +24298,8 @@
         </p:nvSpPr>
         <p:spPr>
           <a:xfrm>
-            <a:off x="3302801" y="1377642"/>
-            <a:ext cx="7605" cy="35777"/>
+            <a:off x="3390714" y="1387383"/>
+            <a:ext cx="12239" cy="57578"/>
           </a:xfrm>
           <a:prstGeom prst="line">
             <a:avLst/>
@@ -24321,8 +24321,8 @@
         </p:nvSpPr>
         <p:spPr>
           <a:xfrm>
-            <a:off x="3374647" y="1366263"/>
-            <a:ext cx="3823" cy="36376"/>
+            <a:off x="3508645" y="1368705"/>
+            <a:ext cx="6153" cy="58542"/>
           </a:xfrm>
           <a:prstGeom prst="line">
             <a:avLst/>
@@ -24344,7 +24344,7 @@
         </p:nvSpPr>
         <p:spPr>
           <a:xfrm>
-            <a:off x="3443630" y="1405719"/>
+            <a:off x="3818592" y="1514835"/>
             <a:ext cx="548640" cy="365760"/>
           </a:xfrm>
           <a:prstGeom prst="rect">
@@ -24361,7 +24361,7 @@
               <a:buNone/>
             </a:pPr>
             <a:r>
-              <a:rPr lang="ko-KR" altLang="en-US" sz="1200" b="1" dirty="0">
+              <a:rPr lang="ko-KR" altLang="en-US" sz="1900" b="1" dirty="0">
                 <a:solidFill>
                   <a:srgbClr val="1F2937"/>
                 </a:solidFill>
@@ -24371,7 +24371,7 @@
               </a:rPr>
               <a:t>1</a:t>
             </a:r>
-            <a:endParaRPr lang="ko-KR" sz="1200" dirty="0"/>
+            <a:endParaRPr lang="ko-KR" sz="1900" dirty="0"/>
           </a:p>
         </p:txBody>
       </p:sp>
@@ -24383,7 +24383,7 @@
         </p:nvSpPr>
         <p:spPr>
           <a:xfrm>
-            <a:off x="3641769" y="1603858"/>
+            <a:off x="4159017" y="1855260"/>
             <a:ext cx="548640" cy="365760"/>
           </a:xfrm>
           <a:prstGeom prst="rect">
@@ -24400,7 +24400,7 @@
               <a:buNone/>
             </a:pPr>
             <a:r>
-              <a:rPr lang="ko-KR" altLang="en-US" sz="1200" b="1" dirty="0">
+              <a:rPr lang="ko-KR" altLang="en-US" sz="1900" b="1" dirty="0">
                 <a:solidFill>
                   <a:srgbClr val="1F2937"/>
                 </a:solidFill>
@@ -24410,7 +24410,7 @@
               </a:rPr>
               <a:t>2</a:t>
             </a:r>
-            <a:endParaRPr lang="ko-KR" sz="1200" dirty="0"/>
+            <a:endParaRPr lang="ko-KR" sz="1900" dirty="0"/>
           </a:p>
         </p:txBody>
       </p:sp>
@@ -24422,7 +24422,7 @@
         </p:nvSpPr>
         <p:spPr>
           <a:xfrm>
-            <a:off x="3714293" y="1874520"/>
+            <a:off x="4283621" y="2320290"/>
             <a:ext cx="548640" cy="365760"/>
           </a:xfrm>
           <a:prstGeom prst="rect">
@@ -24439,7 +24439,7 @@
               <a:buNone/>
             </a:pPr>
             <a:r>
-              <a:rPr lang="ko-KR" altLang="en-US" sz="1200" b="1" dirty="0">
+              <a:rPr lang="ko-KR" altLang="en-US" sz="1900" b="1" dirty="0">
                 <a:solidFill>
                   <a:srgbClr val="1F2937"/>
                 </a:solidFill>
@@ -24449,7 +24449,7 @@
               </a:rPr>
               <a:t>3</a:t>
             </a:r>
-            <a:endParaRPr lang="ko-KR" sz="1200" dirty="0"/>
+            <a:endParaRPr lang="ko-KR" sz="1900" dirty="0"/>
           </a:p>
         </p:txBody>
       </p:sp>
@@ -24461,7 +24461,7 @@
         </p:nvSpPr>
         <p:spPr>
           <a:xfrm>
-            <a:off x="3641769" y="2145182"/>
+            <a:off x="4159017" y="2785320"/>
             <a:ext cx="548640" cy="365760"/>
           </a:xfrm>
           <a:prstGeom prst="rect">
@@ -24478,7 +24478,7 @@
               <a:buNone/>
             </a:pPr>
             <a:r>
-              <a:rPr lang="ko-KR" altLang="en-US" sz="1200" b="1" dirty="0">
+              <a:rPr lang="ko-KR" altLang="en-US" sz="1900" b="1" dirty="0">
                 <a:solidFill>
                   <a:srgbClr val="1F2937"/>
                 </a:solidFill>
@@ -24488,7 +24488,7 @@
               </a:rPr>
               <a:t>4</a:t>
             </a:r>
-            <a:endParaRPr lang="ko-KR" sz="1200" dirty="0"/>
+            <a:endParaRPr lang="ko-KR" sz="1900" dirty="0"/>
           </a:p>
         </p:txBody>
       </p:sp>
@@ -24500,7 +24500,7 @@
         </p:nvSpPr>
         <p:spPr>
           <a:xfrm>
-            <a:off x="3443630" y="2343321"/>
+            <a:off x="3818592" y="3125745"/>
             <a:ext cx="548640" cy="365760"/>
           </a:xfrm>
           <a:prstGeom prst="rect">
@@ -24517,7 +24517,7 @@
               <a:buNone/>
             </a:pPr>
             <a:r>
-              <a:rPr lang="ko-KR" altLang="en-US" sz="1200" b="1" dirty="0">
+              <a:rPr lang="ko-KR" altLang="en-US" sz="1900" b="1" dirty="0">
                 <a:solidFill>
                   <a:srgbClr val="1F2937"/>
                 </a:solidFill>
@@ -24527,7 +24527,7 @@
               </a:rPr>
               <a:t>5</a:t>
             </a:r>
-            <a:endParaRPr lang="ko-KR" sz="1200" dirty="0"/>
+            <a:endParaRPr lang="ko-KR" sz="1900" dirty="0"/>
           </a:p>
         </p:txBody>
       </p:sp>
@@ -24539,7 +24539,7 @@
         </p:nvSpPr>
         <p:spPr>
           <a:xfrm>
-            <a:off x="3172968" y="2415845"/>
+            <a:off x="3353562" y="3250349"/>
             <a:ext cx="548640" cy="365760"/>
           </a:xfrm>
           <a:prstGeom prst="rect">
@@ -24556,7 +24556,7 @@
               <a:buNone/>
             </a:pPr>
             <a:r>
-              <a:rPr lang="ko-KR" altLang="en-US" sz="1200" b="1" dirty="0">
+              <a:rPr lang="ko-KR" altLang="en-US" sz="1900" b="1" dirty="0">
                 <a:solidFill>
                   <a:srgbClr val="1F2937"/>
                 </a:solidFill>
@@ -24566,7 +24566,7 @@
               </a:rPr>
               <a:t>6</a:t>
             </a:r>
-            <a:endParaRPr lang="ko-KR" sz="1200" dirty="0"/>
+            <a:endParaRPr lang="ko-KR" sz="1900" dirty="0"/>
           </a:p>
         </p:txBody>
       </p:sp>
@@ -24578,7 +24578,7 @@
         </p:nvSpPr>
         <p:spPr>
           <a:xfrm>
-            <a:off x="2902306" y="2343321"/>
+            <a:off x="2888532" y="3125745"/>
             <a:ext cx="548640" cy="365760"/>
           </a:xfrm>
           <a:prstGeom prst="rect">
@@ -24595,7 +24595,7 @@
               <a:buNone/>
             </a:pPr>
             <a:r>
-              <a:rPr lang="ko-KR" altLang="en-US" sz="1200" b="1" dirty="0">
+              <a:rPr lang="ko-KR" altLang="en-US" sz="1900" b="1" dirty="0">
                 <a:solidFill>
                   <a:srgbClr val="1F2937"/>
                 </a:solidFill>
@@ -24605,7 +24605,7 @@
               </a:rPr>
               <a:t>7</a:t>
             </a:r>
-            <a:endParaRPr lang="ko-KR" sz="1200" dirty="0"/>
+            <a:endParaRPr lang="ko-KR" sz="1900" dirty="0"/>
           </a:p>
         </p:txBody>
       </p:sp>
@@ -24617,7 +24617,7 @@
         </p:nvSpPr>
         <p:spPr>
           <a:xfrm>
-            <a:off x="2704167" y="2145182"/>
+            <a:off x="2548107" y="2785320"/>
             <a:ext cx="548640" cy="365760"/>
           </a:xfrm>
           <a:prstGeom prst="rect">
@@ -24634,7 +24634,7 @@
               <a:buNone/>
             </a:pPr>
             <a:r>
-              <a:rPr lang="ko-KR" altLang="en-US" sz="1200" b="1" dirty="0">
+              <a:rPr lang="ko-KR" altLang="en-US" sz="1900" b="1" dirty="0">
                 <a:solidFill>
                   <a:srgbClr val="1F2937"/>
                 </a:solidFill>
@@ -24644,7 +24644,7 @@
               </a:rPr>
               <a:t>8</a:t>
             </a:r>
-            <a:endParaRPr lang="ko-KR" sz="1200" dirty="0"/>
+            <a:endParaRPr lang="ko-KR" sz="1900" dirty="0"/>
           </a:p>
         </p:txBody>
       </p:sp>
@@ -24656,7 +24656,7 @@
         </p:nvSpPr>
         <p:spPr>
           <a:xfrm>
-            <a:off x="2631643" y="1874520"/>
+            <a:off x="2423503" y="2320290"/>
             <a:ext cx="548640" cy="365760"/>
           </a:xfrm>
           <a:prstGeom prst="rect">
@@ -24673,7 +24673,7 @@
               <a:buNone/>
             </a:pPr>
             <a:r>
-              <a:rPr lang="ko-KR" altLang="en-US" sz="1200" b="1" dirty="0">
+              <a:rPr lang="ko-KR" altLang="en-US" sz="1900" b="1" dirty="0">
                 <a:solidFill>
                   <a:srgbClr val="1F2937"/>
                 </a:solidFill>
@@ -24683,7 +24683,7 @@
               </a:rPr>
               <a:t>9</a:t>
             </a:r>
-            <a:endParaRPr lang="ko-KR" sz="1200" dirty="0"/>
+            <a:endParaRPr lang="ko-KR" sz="1900" dirty="0"/>
           </a:p>
         </p:txBody>
       </p:sp>
@@ -24695,7 +24695,7 @@
         </p:nvSpPr>
         <p:spPr>
           <a:xfrm>
-            <a:off x="2704167" y="1603858"/>
+            <a:off x="2548107" y="1855260"/>
             <a:ext cx="548640" cy="365760"/>
           </a:xfrm>
           <a:prstGeom prst="rect">
@@ -24712,7 +24712,7 @@
               <a:buNone/>
             </a:pPr>
             <a:r>
-              <a:rPr lang="ko-KR" altLang="en-US" sz="1200" b="1" dirty="0">
+              <a:rPr lang="ko-KR" altLang="en-US" sz="1900" b="1" dirty="0">
                 <a:solidFill>
                   <a:srgbClr val="1F2937"/>
                 </a:solidFill>
@@ -24722,7 +24722,7 @@
               </a:rPr>
               <a:t>10</a:t>
             </a:r>
-            <a:endParaRPr lang="ko-KR" sz="1200" dirty="0"/>
+            <a:endParaRPr lang="ko-KR" sz="1900" dirty="0"/>
           </a:p>
         </p:txBody>
       </p:sp>
@@ -24734,7 +24734,7 @@
         </p:nvSpPr>
         <p:spPr>
           <a:xfrm>
-            <a:off x="2902306" y="1405719"/>
+            <a:off x="2888532" y="1514835"/>
             <a:ext cx="548640" cy="365760"/>
           </a:xfrm>
           <a:prstGeom prst="rect">
@@ -24751,7 +24751,7 @@
               <a:buNone/>
             </a:pPr>
             <a:r>
-              <a:rPr lang="ko-KR" altLang="en-US" sz="1200" b="1" dirty="0">
+              <a:rPr lang="ko-KR" altLang="en-US" sz="1900" b="1" dirty="0">
                 <a:solidFill>
                   <a:srgbClr val="1F2937"/>
                 </a:solidFill>
@@ -24761,7 +24761,7 @@
               </a:rPr>
               <a:t>11</a:t>
             </a:r>
-            <a:endParaRPr lang="ko-KR" sz="1200" dirty="0"/>
+            <a:endParaRPr lang="ko-KR" sz="1900" dirty="0"/>
           </a:p>
         </p:txBody>
       </p:sp>
@@ -24773,7 +24773,7 @@
         </p:nvSpPr>
         <p:spPr>
           <a:xfrm>
-            <a:off x="3172968" y="1333195"/>
+            <a:off x="3353562" y="1390231"/>
             <a:ext cx="548640" cy="365760"/>
           </a:xfrm>
           <a:prstGeom prst="rect">
@@ -24790,7 +24790,7 @@
               <a:buNone/>
             </a:pPr>
             <a:r>
-              <a:rPr lang="ko-KR" altLang="en-US" sz="1200" b="1" dirty="0">
+              <a:rPr lang="ko-KR" altLang="en-US" sz="1900" b="1" dirty="0">
                 <a:solidFill>
                   <a:srgbClr val="1F2937"/>
                 </a:solidFill>
@@ -24800,7 +24800,7 @@
               </a:rPr>
               <a:t>12</a:t>
             </a:r>
-            <a:endParaRPr lang="ko-KR" sz="1200" dirty="0"/>
+            <a:endParaRPr lang="ko-KR" sz="1900" dirty="0"/>
           </a:p>
         </p:txBody>
       </p:sp>
@@ -24812,8 +24812,8 @@
         </p:nvSpPr>
         <p:spPr>
           <a:xfrm>
-            <a:off x="3447288" y="2057400"/>
-            <a:ext cx="365760" cy="0"/>
+            <a:off x="3627882" y="2503170"/>
+            <a:ext cx="518008" cy="0"/>
           </a:xfrm>
           <a:prstGeom prst="line">
             <a:avLst/>
@@ -24835,8 +24835,8 @@
         </p:nvSpPr>
         <p:spPr>
           <a:xfrm flipV="1">
-            <a:off x="3447288" y="1486814"/>
-            <a:ext cx="0" cy="570586"/>
+            <a:off x="3627882" y="1749704"/>
+            <a:ext cx="0" cy="753466"/>
           </a:xfrm>
           <a:prstGeom prst="line">
             <a:avLst/>
@@ -24858,7 +24858,7 @@
         </p:nvSpPr>
         <p:spPr>
           <a:xfrm>
-            <a:off x="3392424" y="2002536"/>
+            <a:off x="3573018" y="2448306"/>
             <a:ext cx="109728" cy="109728"/>
           </a:xfrm>
           <a:prstGeom prst="ellipse">
@@ -24883,7 +24883,7 @@
         </p:nvSpPr>
         <p:spPr>
           <a:xfrm>
-            <a:off x="6277356" y="1773936"/>
+            <a:off x="6277356" y="2219706"/>
             <a:ext cx="566928" cy="566928"/>
           </a:xfrm>
           <a:prstGeom prst="roundRect">
@@ -24930,8 +24930,8 @@
         </p:nvSpPr>
         <p:spPr>
           <a:xfrm>
-            <a:off x="8444484" y="1325880"/>
-            <a:ext cx="1463040" cy="1463040"/>
+            <a:off x="8179308" y="1325880"/>
+            <a:ext cx="2354580" cy="2354580"/>
           </a:xfrm>
           <a:prstGeom prst="ellipse">
             <a:avLst/>
@@ -24955,8 +24955,8 @@
         </p:nvSpPr>
         <p:spPr>
           <a:xfrm>
-            <a:off x="9176004" y="1362456"/>
-            <a:ext cx="0" cy="80467"/>
+            <a:off x="9356598" y="1362456"/>
+            <a:ext cx="0" cy="129502"/>
           </a:xfrm>
           <a:prstGeom prst="line">
             <a:avLst/>
@@ -24978,8 +24978,8 @@
         </p:nvSpPr>
         <p:spPr>
           <a:xfrm flipH="1">
-            <a:off x="9244822" y="1366263"/>
-            <a:ext cx="3823" cy="36376"/>
+            <a:off x="9469682" y="1368705"/>
+            <a:ext cx="6153" cy="58542"/>
           </a:xfrm>
           <a:prstGeom prst="line">
             <a:avLst/>
@@ -25001,8 +25001,8 @@
         </p:nvSpPr>
         <p:spPr>
           <a:xfrm flipH="1">
-            <a:off x="9312886" y="1377642"/>
-            <a:ext cx="7605" cy="35777"/>
+            <a:off x="9581527" y="1387383"/>
+            <a:ext cx="12239" cy="57578"/>
           </a:xfrm>
           <a:prstGeom prst="line">
             <a:avLst/>
@@ -25024,8 +25024,8 @@
         </p:nvSpPr>
         <p:spPr>
           <a:xfrm flipH="1">
-            <a:off x="9379451" y="1396469"/>
-            <a:ext cx="11303" cy="34786"/>
+            <a:off x="9690908" y="1418287"/>
+            <a:ext cx="18190" cy="55983"/>
           </a:xfrm>
           <a:prstGeom prst="line">
             <a:avLst/>
@@ -25047,8 +25047,8 @@
         </p:nvSpPr>
         <p:spPr>
           <a:xfrm flipH="1">
-            <a:off x="9443786" y="1422537"/>
-            <a:ext cx="14877" cy="33414"/>
+            <a:off x="9796626" y="1461076"/>
+            <a:ext cx="23942" cy="53775"/>
           </a:xfrm>
           <a:prstGeom prst="line">
             <a:avLst/>
@@ -25070,8 +25070,8 @@
         </p:nvSpPr>
         <p:spPr>
           <a:xfrm flipH="1">
-            <a:off x="9483242" y="1455561"/>
-            <a:ext cx="40234" cy="69687"/>
+            <a:off x="9862204" y="1515283"/>
+            <a:ext cx="64751" cy="112152"/>
           </a:xfrm>
           <a:prstGeom prst="line">
             <a:avLst/>
@@ -25093,8 +25093,8 @@
         </p:nvSpPr>
         <p:spPr>
           <a:xfrm flipH="1">
-            <a:off x="9562983" y="1495178"/>
-            <a:ext cx="21499" cy="29591"/>
+            <a:off x="9992493" y="1580313"/>
+            <a:ext cx="34600" cy="47622"/>
           </a:xfrm>
           <a:prstGeom prst="line">
             <a:avLst/>
@@ -25116,8 +25116,8 @@
         </p:nvSpPr>
         <p:spPr>
           <a:xfrm flipH="1">
-            <a:off x="9616538" y="1540956"/>
-            <a:ext cx="24474" cy="27181"/>
+            <a:off x="10080497" y="1655454"/>
+            <a:ext cx="39388" cy="43745"/>
           </a:xfrm>
           <a:prstGeom prst="line">
             <a:avLst/>
@@ -25139,8 +25139,8 @@
         </p:nvSpPr>
         <p:spPr>
           <a:xfrm flipH="1">
-            <a:off x="9665267" y="1592392"/>
-            <a:ext cx="27181" cy="24474"/>
+            <a:off x="10160569" y="1739883"/>
+            <a:ext cx="43745" cy="39388"/>
           </a:xfrm>
           <a:prstGeom prst="line">
             <a:avLst/>
@@ -25162,8 +25162,8 @@
         </p:nvSpPr>
         <p:spPr>
           <a:xfrm flipH="1">
-            <a:off x="9708635" y="1648922"/>
-            <a:ext cx="29591" cy="21499"/>
+            <a:off x="10231833" y="1832675"/>
+            <a:ext cx="47622" cy="34600"/>
           </a:xfrm>
           <a:prstGeom prst="line">
             <a:avLst/>
@@ -25185,8 +25185,8 @@
         </p:nvSpPr>
         <p:spPr>
           <a:xfrm flipH="1">
-            <a:off x="9708157" y="1709928"/>
-            <a:ext cx="69687" cy="40234"/>
+            <a:off x="10232333" y="1932813"/>
+            <a:ext cx="112152" cy="64751"/>
           </a:xfrm>
           <a:prstGeom prst="line">
             <a:avLst/>
@@ -25208,8 +25208,8 @@
         </p:nvSpPr>
         <p:spPr>
           <a:xfrm flipH="1">
-            <a:off x="9777453" y="1774741"/>
-            <a:ext cx="33414" cy="14877"/>
+            <a:off x="10344917" y="2039200"/>
+            <a:ext cx="53775" cy="23942"/>
           </a:xfrm>
           <a:prstGeom prst="line">
             <a:avLst/>
@@ -25231,8 +25231,8 @@
         </p:nvSpPr>
         <p:spPr>
           <a:xfrm flipH="1">
-            <a:off x="9802149" y="1842650"/>
-            <a:ext cx="34786" cy="11303"/>
+            <a:off x="10385498" y="2150670"/>
+            <a:ext cx="55983" cy="18190"/>
           </a:xfrm>
           <a:prstGeom prst="line">
             <a:avLst/>
@@ -25254,8 +25254,8 @@
         </p:nvSpPr>
         <p:spPr>
           <a:xfrm flipH="1">
-            <a:off x="9819985" y="1912913"/>
-            <a:ext cx="35777" cy="7605"/>
+            <a:off x="10414806" y="2266002"/>
+            <a:ext cx="57578" cy="12239"/>
           </a:xfrm>
           <a:prstGeom prst="line">
             <a:avLst/>
@@ -25277,8 +25277,8 @@
         </p:nvSpPr>
         <p:spPr>
           <a:xfrm flipH="1">
-            <a:off x="9830765" y="1984759"/>
-            <a:ext cx="36376" cy="3823"/>
+            <a:off x="10432521" y="2383933"/>
+            <a:ext cx="58542" cy="6153"/>
           </a:xfrm>
           <a:prstGeom prst="line">
             <a:avLst/>
@@ -25300,8 +25300,8 @@
         </p:nvSpPr>
         <p:spPr>
           <a:xfrm flipH="1">
-            <a:off x="9790481" y="2057400"/>
-            <a:ext cx="80467" cy="0"/>
+            <a:off x="10367810" y="2503170"/>
+            <a:ext cx="129502" cy="0"/>
           </a:xfrm>
           <a:prstGeom prst="line">
             <a:avLst/>
@@ -25323,8 +25323,8 @@
         </p:nvSpPr>
         <p:spPr>
           <a:xfrm flipH="1" flipV="1">
-            <a:off x="9830765" y="2126218"/>
-            <a:ext cx="36376" cy="3823"/>
+            <a:off x="10432521" y="2616254"/>
+            <a:ext cx="58542" cy="6153"/>
           </a:xfrm>
           <a:prstGeom prst="line">
             <a:avLst/>
@@ -25346,8 +25346,8 @@
         </p:nvSpPr>
         <p:spPr>
           <a:xfrm flipH="1" flipV="1">
-            <a:off x="9819985" y="2194282"/>
-            <a:ext cx="35777" cy="7605"/>
+            <a:off x="10414806" y="2728099"/>
+            <a:ext cx="57578" cy="12239"/>
           </a:xfrm>
           <a:prstGeom prst="line">
             <a:avLst/>
@@ -25369,8 +25369,8 @@
         </p:nvSpPr>
         <p:spPr>
           <a:xfrm flipH="1" flipV="1">
-            <a:off x="9802149" y="2260847"/>
-            <a:ext cx="34786" cy="11303"/>
+            <a:off x="10385498" y="2837480"/>
+            <a:ext cx="55983" cy="18190"/>
           </a:xfrm>
           <a:prstGeom prst="line">
             <a:avLst/>
@@ -25392,8 +25392,8 @@
         </p:nvSpPr>
         <p:spPr>
           <a:xfrm flipH="1" flipV="1">
-            <a:off x="9777453" y="2325182"/>
-            <a:ext cx="33414" cy="14877"/>
+            <a:off x="10344917" y="2943198"/>
+            <a:ext cx="53775" cy="23942"/>
           </a:xfrm>
           <a:prstGeom prst="line">
             <a:avLst/>
@@ -25415,8 +25415,8 @@
         </p:nvSpPr>
         <p:spPr>
           <a:xfrm flipH="1" flipV="1">
-            <a:off x="9708157" y="2364638"/>
-            <a:ext cx="69687" cy="40234"/>
+            <a:off x="10232333" y="3008776"/>
+            <a:ext cx="112152" cy="64751"/>
           </a:xfrm>
           <a:prstGeom prst="line">
             <a:avLst/>
@@ -25438,8 +25438,8 @@
         </p:nvSpPr>
         <p:spPr>
           <a:xfrm flipH="1" flipV="1">
-            <a:off x="9708635" y="2444379"/>
-            <a:ext cx="29591" cy="21499"/>
+            <a:off x="10231833" y="3139065"/>
+            <a:ext cx="47622" cy="34600"/>
           </a:xfrm>
           <a:prstGeom prst="line">
             <a:avLst/>
@@ -25461,8 +25461,8 @@
         </p:nvSpPr>
         <p:spPr>
           <a:xfrm flipH="1" flipV="1">
-            <a:off x="9665267" y="2497934"/>
-            <a:ext cx="27181" cy="24474"/>
+            <a:off x="10160569" y="3227069"/>
+            <a:ext cx="43745" cy="39388"/>
           </a:xfrm>
           <a:prstGeom prst="line">
             <a:avLst/>
@@ -25484,8 +25484,8 @@
         </p:nvSpPr>
         <p:spPr>
           <a:xfrm flipH="1" flipV="1">
-            <a:off x="9616538" y="2546663"/>
-            <a:ext cx="24474" cy="27181"/>
+            <a:off x="10080497" y="3307141"/>
+            <a:ext cx="39388" cy="43745"/>
           </a:xfrm>
           <a:prstGeom prst="line">
             <a:avLst/>
@@ -25507,8 +25507,8 @@
         </p:nvSpPr>
         <p:spPr>
           <a:xfrm flipH="1" flipV="1">
-            <a:off x="9562983" y="2590031"/>
-            <a:ext cx="21499" cy="29591"/>
+            <a:off x="9992493" y="3378405"/>
+            <a:ext cx="34600" cy="47622"/>
           </a:xfrm>
           <a:prstGeom prst="line">
             <a:avLst/>
@@ -25530,8 +25530,8 @@
         </p:nvSpPr>
         <p:spPr>
           <a:xfrm flipH="1" flipV="1">
-            <a:off x="9483242" y="2589553"/>
-            <a:ext cx="40234" cy="69687"/>
+            <a:off x="9862204" y="3378905"/>
+            <a:ext cx="64751" cy="112152"/>
           </a:xfrm>
           <a:prstGeom prst="line">
             <a:avLst/>
@@ -25553,8 +25553,8 @@
         </p:nvSpPr>
         <p:spPr>
           <a:xfrm flipH="1" flipV="1">
-            <a:off x="9443786" y="2658849"/>
-            <a:ext cx="14877" cy="33414"/>
+            <a:off x="9796626" y="3491489"/>
+            <a:ext cx="23942" cy="53775"/>
           </a:xfrm>
           <a:prstGeom prst="line">
             <a:avLst/>
@@ -25576,8 +25576,8 @@
         </p:nvSpPr>
         <p:spPr>
           <a:xfrm flipH="1" flipV="1">
-            <a:off x="9379451" y="2683545"/>
-            <a:ext cx="11303" cy="34786"/>
+            <a:off x="9690908" y="3532070"/>
+            <a:ext cx="18190" cy="55983"/>
           </a:xfrm>
           <a:prstGeom prst="line">
             <a:avLst/>
@@ -25599,8 +25599,8 @@
         </p:nvSpPr>
         <p:spPr>
           <a:xfrm flipH="1" flipV="1">
-            <a:off x="9312886" y="2701381"/>
-            <a:ext cx="7605" cy="35777"/>
+            <a:off x="9581527" y="3561378"/>
+            <a:ext cx="12239" cy="57578"/>
           </a:xfrm>
           <a:prstGeom prst="line">
             <a:avLst/>
@@ -25622,8 +25622,8 @@
         </p:nvSpPr>
         <p:spPr>
           <a:xfrm flipH="1" flipV="1">
-            <a:off x="9244822" y="2712161"/>
-            <a:ext cx="3823" cy="36376"/>
+            <a:off x="9469682" y="3579093"/>
+            <a:ext cx="6153" cy="58542"/>
           </a:xfrm>
           <a:prstGeom prst="line">
             <a:avLst/>
@@ -25645,8 +25645,8 @@
         </p:nvSpPr>
         <p:spPr>
           <a:xfrm flipV="1">
-            <a:off x="9176004" y="2671877"/>
-            <a:ext cx="0" cy="80467"/>
+            <a:off x="9356598" y="3514382"/>
+            <a:ext cx="0" cy="129502"/>
           </a:xfrm>
           <a:prstGeom prst="line">
             <a:avLst/>
@@ -25668,8 +25668,8 @@
         </p:nvSpPr>
         <p:spPr>
           <a:xfrm flipV="1">
-            <a:off x="9103363" y="2712161"/>
-            <a:ext cx="3823" cy="36376"/>
+            <a:off x="9237361" y="3579093"/>
+            <a:ext cx="6153" cy="58542"/>
           </a:xfrm>
           <a:prstGeom prst="line">
             <a:avLst/>
@@ -25691,8 +25691,8 @@
         </p:nvSpPr>
         <p:spPr>
           <a:xfrm flipV="1">
-            <a:off x="9031517" y="2701381"/>
-            <a:ext cx="7605" cy="35777"/>
+            <a:off x="9119430" y="3561378"/>
+            <a:ext cx="12239" cy="57578"/>
           </a:xfrm>
           <a:prstGeom prst="line">
             <a:avLst/>
@@ -25714,8 +25714,8 @@
         </p:nvSpPr>
         <p:spPr>
           <a:xfrm flipV="1">
-            <a:off x="8961254" y="2683545"/>
-            <a:ext cx="11303" cy="34786"/>
+            <a:off x="9004098" y="3532070"/>
+            <a:ext cx="18190" cy="55983"/>
           </a:xfrm>
           <a:prstGeom prst="line">
             <a:avLst/>
@@ -25737,8 +25737,8 @@
         </p:nvSpPr>
         <p:spPr>
           <a:xfrm flipV="1">
-            <a:off x="8893345" y="2658849"/>
-            <a:ext cx="14877" cy="33414"/>
+            <a:off x="8892628" y="3491489"/>
+            <a:ext cx="23942" cy="53775"/>
           </a:xfrm>
           <a:prstGeom prst="line">
             <a:avLst/>
@@ -25760,8 +25760,8 @@
         </p:nvSpPr>
         <p:spPr>
           <a:xfrm flipV="1">
-            <a:off x="8828532" y="2589553"/>
-            <a:ext cx="40234" cy="69687"/>
+            <a:off x="8786241" y="3378905"/>
+            <a:ext cx="64751" cy="112152"/>
           </a:xfrm>
           <a:prstGeom prst="line">
             <a:avLst/>
@@ -25783,8 +25783,8 @@
         </p:nvSpPr>
         <p:spPr>
           <a:xfrm flipV="1">
-            <a:off x="8767526" y="2590031"/>
-            <a:ext cx="21499" cy="29591"/>
+            <a:off x="8686103" y="3378405"/>
+            <a:ext cx="34600" cy="47622"/>
           </a:xfrm>
           <a:prstGeom prst="line">
             <a:avLst/>
@@ -25806,8 +25806,8 @@
         </p:nvSpPr>
         <p:spPr>
           <a:xfrm flipV="1">
-            <a:off x="8710996" y="2546663"/>
-            <a:ext cx="24474" cy="27181"/>
+            <a:off x="8593311" y="3307141"/>
+            <a:ext cx="39388" cy="43745"/>
           </a:xfrm>
           <a:prstGeom prst="line">
             <a:avLst/>
@@ -25829,8 +25829,8 @@
         </p:nvSpPr>
         <p:spPr>
           <a:xfrm flipV="1">
-            <a:off x="8659560" y="2497934"/>
-            <a:ext cx="27181" cy="24474"/>
+            <a:off x="8508882" y="3227069"/>
+            <a:ext cx="43745" cy="39388"/>
           </a:xfrm>
           <a:prstGeom prst="line">
             <a:avLst/>
@@ -25852,8 +25852,8 @@
         </p:nvSpPr>
         <p:spPr>
           <a:xfrm flipV="1">
-            <a:off x="8613782" y="2444379"/>
-            <a:ext cx="29591" cy="21499"/>
+            <a:off x="8433741" y="3139065"/>
+            <a:ext cx="47622" cy="34600"/>
           </a:xfrm>
           <a:prstGeom prst="line">
             <a:avLst/>
@@ -25875,8 +25875,8 @@
         </p:nvSpPr>
         <p:spPr>
           <a:xfrm flipV="1">
-            <a:off x="8574165" y="2364638"/>
-            <a:ext cx="69687" cy="40234"/>
+            <a:off x="8368711" y="3008776"/>
+            <a:ext cx="112152" cy="64751"/>
           </a:xfrm>
           <a:prstGeom prst="line">
             <a:avLst/>
@@ -25898,8 +25898,8 @@
         </p:nvSpPr>
         <p:spPr>
           <a:xfrm flipV="1">
-            <a:off x="8541141" y="2325182"/>
-            <a:ext cx="33414" cy="14877"/>
+            <a:off x="8314504" y="2943198"/>
+            <a:ext cx="53775" cy="23942"/>
           </a:xfrm>
           <a:prstGeom prst="line">
             <a:avLst/>
@@ -25921,8 +25921,8 @@
         </p:nvSpPr>
         <p:spPr>
           <a:xfrm flipV="1">
-            <a:off x="8515073" y="2260847"/>
-            <a:ext cx="34786" cy="11303"/>
+            <a:off x="8271715" y="2837480"/>
+            <a:ext cx="55983" cy="18190"/>
           </a:xfrm>
           <a:prstGeom prst="line">
             <a:avLst/>
@@ -25944,8 +25944,8 @@
         </p:nvSpPr>
         <p:spPr>
           <a:xfrm flipV="1">
-            <a:off x="8496246" y="2194282"/>
-            <a:ext cx="35777" cy="7605"/>
+            <a:off x="8240811" y="2728099"/>
+            <a:ext cx="57578" cy="12239"/>
           </a:xfrm>
           <a:prstGeom prst="line">
             <a:avLst/>
@@ -25967,8 +25967,8 @@
         </p:nvSpPr>
         <p:spPr>
           <a:xfrm flipV="1">
-            <a:off x="8484867" y="2126218"/>
-            <a:ext cx="36376" cy="3823"/>
+            <a:off x="8222133" y="2616254"/>
+            <a:ext cx="58542" cy="6153"/>
           </a:xfrm>
           <a:prstGeom prst="line">
             <a:avLst/>
@@ -25989,9 +25989,9 @@
           <p:nvPr/>
         </p:nvSpPr>
         <p:spPr>
-          <a:xfrm>
-            <a:off x="8481060" y="2057400"/>
-            <a:ext cx="80467" cy="0"/>
+          <a:xfrm flipV="1">
+            <a:off x="8215884" y="2503170"/>
+            <a:ext cx="129502" cy="0"/>
           </a:xfrm>
           <a:prstGeom prst="line">
             <a:avLst/>
@@ -26013,8 +26013,8 @@
         </p:nvSpPr>
         <p:spPr>
           <a:xfrm>
-            <a:off x="8484867" y="1984759"/>
-            <a:ext cx="36376" cy="3823"/>
+            <a:off x="8222133" y="2383933"/>
+            <a:ext cx="58542" cy="6153"/>
           </a:xfrm>
           <a:prstGeom prst="line">
             <a:avLst/>
@@ -26036,8 +26036,8 @@
         </p:nvSpPr>
         <p:spPr>
           <a:xfrm>
-            <a:off x="8496246" y="1912913"/>
-            <a:ext cx="35777" cy="7605"/>
+            <a:off x="8240811" y="2266002"/>
+            <a:ext cx="57578" cy="12239"/>
           </a:xfrm>
           <a:prstGeom prst="line">
             <a:avLst/>
@@ -26059,8 +26059,8 @@
         </p:nvSpPr>
         <p:spPr>
           <a:xfrm>
-            <a:off x="8515073" y="1842650"/>
-            <a:ext cx="34786" cy="11303"/>
+            <a:off x="8271715" y="2150670"/>
+            <a:ext cx="55983" cy="18190"/>
           </a:xfrm>
           <a:prstGeom prst="line">
             <a:avLst/>
@@ -26082,8 +26082,8 @@
         </p:nvSpPr>
         <p:spPr>
           <a:xfrm>
-            <a:off x="8541141" y="1774741"/>
-            <a:ext cx="33414" cy="14877"/>
+            <a:off x="8314504" y="2039200"/>
+            <a:ext cx="53775" cy="23942"/>
           </a:xfrm>
           <a:prstGeom prst="line">
             <a:avLst/>
@@ -26105,8 +26105,8 @@
         </p:nvSpPr>
         <p:spPr>
           <a:xfrm>
-            <a:off x="8574165" y="1709928"/>
-            <a:ext cx="69687" cy="40234"/>
+            <a:off x="8368711" y="1932813"/>
+            <a:ext cx="112152" cy="64751"/>
           </a:xfrm>
           <a:prstGeom prst="line">
             <a:avLst/>
@@ -26128,8 +26128,8 @@
         </p:nvSpPr>
         <p:spPr>
           <a:xfrm>
-            <a:off x="8613782" y="1648922"/>
-            <a:ext cx="29591" cy="21499"/>
+            <a:off x="8433741" y="1832675"/>
+            <a:ext cx="47622" cy="34600"/>
           </a:xfrm>
           <a:prstGeom prst="line">
             <a:avLst/>
@@ -26151,8 +26151,8 @@
         </p:nvSpPr>
         <p:spPr>
           <a:xfrm>
-            <a:off x="8659560" y="1592392"/>
-            <a:ext cx="27181" cy="24474"/>
+            <a:off x="8508882" y="1739883"/>
+            <a:ext cx="43745" cy="39388"/>
           </a:xfrm>
           <a:prstGeom prst="line">
             <a:avLst/>
@@ -26174,8 +26174,8 @@
         </p:nvSpPr>
         <p:spPr>
           <a:xfrm>
-            <a:off x="8710996" y="1540956"/>
-            <a:ext cx="24474" cy="27181"/>
+            <a:off x="8593311" y="1655454"/>
+            <a:ext cx="39388" cy="43745"/>
           </a:xfrm>
           <a:prstGeom prst="line">
             <a:avLst/>
@@ -26197,8 +26197,8 @@
         </p:nvSpPr>
         <p:spPr>
           <a:xfrm>
-            <a:off x="8767526" y="1495178"/>
-            <a:ext cx="21499" cy="29591"/>
+            <a:off x="8686103" y="1580313"/>
+            <a:ext cx="34600" cy="47622"/>
           </a:xfrm>
           <a:prstGeom prst="line">
             <a:avLst/>
@@ -26220,8 +26220,8 @@
         </p:nvSpPr>
         <p:spPr>
           <a:xfrm>
-            <a:off x="8828532" y="1455561"/>
-            <a:ext cx="40234" cy="69687"/>
+            <a:off x="8786241" y="1515283"/>
+            <a:ext cx="64751" cy="112152"/>
           </a:xfrm>
           <a:prstGeom prst="line">
             <a:avLst/>
@@ -26243,8 +26243,8 @@
         </p:nvSpPr>
         <p:spPr>
           <a:xfrm>
-            <a:off x="8893345" y="1422537"/>
-            <a:ext cx="14877" cy="33414"/>
+            <a:off x="8892628" y="1461076"/>
+            <a:ext cx="23942" cy="53775"/>
           </a:xfrm>
           <a:prstGeom prst="line">
             <a:avLst/>
@@ -26266,8 +26266,8 @@
         </p:nvSpPr>
         <p:spPr>
           <a:xfrm>
-            <a:off x="8961254" y="1396469"/>
-            <a:ext cx="11303" cy="34786"/>
+            <a:off x="9004098" y="1418287"/>
+            <a:ext cx="18190" cy="55983"/>
           </a:xfrm>
           <a:prstGeom prst="line">
             <a:avLst/>
@@ -26289,8 +26289,8 @@
         </p:nvSpPr>
         <p:spPr>
           <a:xfrm>
-            <a:off x="9031517" y="1377642"/>
-            <a:ext cx="7605" cy="35777"/>
+            <a:off x="9119430" y="1387383"/>
+            <a:ext cx="12239" cy="57578"/>
           </a:xfrm>
           <a:prstGeom prst="line">
             <a:avLst/>
@@ -26312,8 +26312,8 @@
         </p:nvSpPr>
         <p:spPr>
           <a:xfrm>
-            <a:off x="9103363" y="1366263"/>
-            <a:ext cx="3823" cy="36376"/>
+            <a:off x="9237361" y="1368705"/>
+            <a:ext cx="6153" cy="58542"/>
           </a:xfrm>
           <a:prstGeom prst="line">
             <a:avLst/>
@@ -26335,7 +26335,7 @@
         </p:nvSpPr>
         <p:spPr>
           <a:xfrm>
-            <a:off x="9172346" y="1405719"/>
+            <a:off x="9547308" y="1514835"/>
             <a:ext cx="548640" cy="365760"/>
           </a:xfrm>
           <a:prstGeom prst="rect">
@@ -26352,7 +26352,7 @@
               <a:buNone/>
             </a:pPr>
             <a:r>
-              <a:rPr lang="ko-KR" altLang="en-US" sz="1200" b="1" dirty="0">
+              <a:rPr lang="ko-KR" altLang="en-US" sz="1900" b="1" dirty="0">
                 <a:solidFill>
                   <a:srgbClr val="1F2937"/>
                 </a:solidFill>
@@ -26362,7 +26362,7 @@
               </a:rPr>
               <a:t>1</a:t>
             </a:r>
-            <a:endParaRPr lang="ko-KR" sz="1200" dirty="0"/>
+            <a:endParaRPr lang="ko-KR" sz="1900" dirty="0"/>
           </a:p>
         </p:txBody>
       </p:sp>
@@ -26374,7 +26374,7 @@
         </p:nvSpPr>
         <p:spPr>
           <a:xfrm>
-            <a:off x="9370485" y="1603858"/>
+            <a:off x="9887733" y="1855260"/>
             <a:ext cx="548640" cy="365760"/>
           </a:xfrm>
           <a:prstGeom prst="rect">
@@ -26391,7 +26391,7 @@
               <a:buNone/>
             </a:pPr>
             <a:r>
-              <a:rPr lang="ko-KR" altLang="en-US" sz="1200" b="1" dirty="0">
+              <a:rPr lang="ko-KR" altLang="en-US" sz="1900" b="1" dirty="0">
                 <a:solidFill>
                   <a:srgbClr val="1F2937"/>
                 </a:solidFill>
@@ -26401,7 +26401,7 @@
               </a:rPr>
               <a:t>2</a:t>
             </a:r>
-            <a:endParaRPr lang="ko-KR" sz="1200" dirty="0"/>
+            <a:endParaRPr lang="ko-KR" sz="1900" dirty="0"/>
           </a:p>
         </p:txBody>
       </p:sp>
@@ -26413,7 +26413,7 @@
         </p:nvSpPr>
         <p:spPr>
           <a:xfrm>
-            <a:off x="9443009" y="1874520"/>
+            <a:off x="10012337" y="2320290"/>
             <a:ext cx="548640" cy="365760"/>
           </a:xfrm>
           <a:prstGeom prst="rect">
@@ -26430,7 +26430,7 @@
               <a:buNone/>
             </a:pPr>
             <a:r>
-              <a:rPr lang="ko-KR" altLang="en-US" sz="1200" b="1" dirty="0">
+              <a:rPr lang="ko-KR" altLang="en-US" sz="1900" b="1" dirty="0">
                 <a:solidFill>
                   <a:srgbClr val="1F2937"/>
                 </a:solidFill>
@@ -26440,7 +26440,7 @@
               </a:rPr>
               <a:t>3</a:t>
             </a:r>
-            <a:endParaRPr lang="ko-KR" sz="1200" dirty="0"/>
+            <a:endParaRPr lang="ko-KR" sz="1900" dirty="0"/>
           </a:p>
         </p:txBody>
       </p:sp>
@@ -26452,7 +26452,7 @@
         </p:nvSpPr>
         <p:spPr>
           <a:xfrm>
-            <a:off x="9370485" y="2145182"/>
+            <a:off x="9887733" y="2785320"/>
             <a:ext cx="548640" cy="365760"/>
           </a:xfrm>
           <a:prstGeom prst="rect">
@@ -26469,7 +26469,7 @@
               <a:buNone/>
             </a:pPr>
             <a:r>
-              <a:rPr lang="ko-KR" altLang="en-US" sz="1200" b="1" dirty="0">
+              <a:rPr lang="ko-KR" altLang="en-US" sz="1900" b="1" dirty="0">
                 <a:solidFill>
                   <a:srgbClr val="1F2937"/>
                 </a:solidFill>
@@ -26479,7 +26479,7 @@
               </a:rPr>
               <a:t>4</a:t>
             </a:r>
-            <a:endParaRPr lang="ko-KR" sz="1200" dirty="0"/>
+            <a:endParaRPr lang="ko-KR" sz="1900" dirty="0"/>
           </a:p>
         </p:txBody>
       </p:sp>
@@ -26491,7 +26491,7 @@
         </p:nvSpPr>
         <p:spPr>
           <a:xfrm>
-            <a:off x="9172346" y="2343321"/>
+            <a:off x="9547308" y="3125745"/>
             <a:ext cx="548640" cy="365760"/>
           </a:xfrm>
           <a:prstGeom prst="rect">
@@ -26508,7 +26508,7 @@
               <a:buNone/>
             </a:pPr>
             <a:r>
-              <a:rPr lang="ko-KR" altLang="en-US" sz="1200" b="1" dirty="0">
+              <a:rPr lang="ko-KR" altLang="en-US" sz="1900" b="1" dirty="0">
                 <a:solidFill>
                   <a:srgbClr val="1F2937"/>
                 </a:solidFill>
@@ -26518,7 +26518,7 @@
               </a:rPr>
               <a:t>5</a:t>
             </a:r>
-            <a:endParaRPr lang="ko-KR" sz="1200" dirty="0"/>
+            <a:endParaRPr lang="ko-KR" sz="1900" dirty="0"/>
           </a:p>
         </p:txBody>
       </p:sp>
@@ -26530,7 +26530,7 @@
         </p:nvSpPr>
         <p:spPr>
           <a:xfrm>
-            <a:off x="8901684" y="2415845"/>
+            <a:off x="9082278" y="3250349"/>
             <a:ext cx="548640" cy="365760"/>
           </a:xfrm>
           <a:prstGeom prst="rect">
@@ -26547,7 +26547,7 @@
               <a:buNone/>
             </a:pPr>
             <a:r>
-              <a:rPr lang="ko-KR" altLang="en-US" sz="1200" b="1" dirty="0">
+              <a:rPr lang="ko-KR" altLang="en-US" sz="1900" b="1" dirty="0">
                 <a:solidFill>
                   <a:srgbClr val="1F2937"/>
                 </a:solidFill>
@@ -26557,7 +26557,7 @@
               </a:rPr>
               <a:t>6</a:t>
             </a:r>
-            <a:endParaRPr lang="ko-KR" sz="1200" dirty="0"/>
+            <a:endParaRPr lang="ko-KR" sz="1900" dirty="0"/>
           </a:p>
         </p:txBody>
       </p:sp>
@@ -26569,7 +26569,7 @@
         </p:nvSpPr>
         <p:spPr>
           <a:xfrm>
-            <a:off x="8631022" y="2343321"/>
+            <a:off x="8617248" y="3125745"/>
             <a:ext cx="548640" cy="365760"/>
           </a:xfrm>
           <a:prstGeom prst="rect">
@@ -26586,7 +26586,7 @@
               <a:buNone/>
             </a:pPr>
             <a:r>
-              <a:rPr lang="ko-KR" altLang="en-US" sz="1200" b="1" dirty="0">
+              <a:rPr lang="ko-KR" altLang="en-US" sz="1900" b="1" dirty="0">
                 <a:solidFill>
                   <a:srgbClr val="1F2937"/>
                 </a:solidFill>
@@ -26596,7 +26596,7 @@
               </a:rPr>
               <a:t>7</a:t>
             </a:r>
-            <a:endParaRPr lang="ko-KR" sz="1200" dirty="0"/>
+            <a:endParaRPr lang="ko-KR" sz="1900" dirty="0"/>
           </a:p>
         </p:txBody>
       </p:sp>
@@ -26608,7 +26608,7 @@
         </p:nvSpPr>
         <p:spPr>
           <a:xfrm>
-            <a:off x="8432883" y="2145182"/>
+            <a:off x="8276823" y="2785320"/>
             <a:ext cx="548640" cy="365760"/>
           </a:xfrm>
           <a:prstGeom prst="rect">
@@ -26625,7 +26625,7 @@
               <a:buNone/>
             </a:pPr>
             <a:r>
-              <a:rPr lang="ko-KR" altLang="en-US" sz="1200" b="1" dirty="0">
+              <a:rPr lang="ko-KR" altLang="en-US" sz="1900" b="1" dirty="0">
                 <a:solidFill>
                   <a:srgbClr val="1F2937"/>
                 </a:solidFill>
@@ -26635,7 +26635,7 @@
               </a:rPr>
               <a:t>8</a:t>
             </a:r>
-            <a:endParaRPr lang="ko-KR" sz="1200" dirty="0"/>
+            <a:endParaRPr lang="ko-KR" sz="1900" dirty="0"/>
           </a:p>
         </p:txBody>
       </p:sp>
@@ -26647,7 +26647,7 @@
         </p:nvSpPr>
         <p:spPr>
           <a:xfrm>
-            <a:off x="8360359" y="1874520"/>
+            <a:off x="8152219" y="2320290"/>
             <a:ext cx="548640" cy="365760"/>
           </a:xfrm>
           <a:prstGeom prst="rect">
@@ -26664,7 +26664,7 @@
               <a:buNone/>
             </a:pPr>
             <a:r>
-              <a:rPr lang="ko-KR" altLang="en-US" sz="1200" b="1" dirty="0">
+              <a:rPr lang="ko-KR" altLang="en-US" sz="1900" b="1" dirty="0">
                 <a:solidFill>
                   <a:srgbClr val="1F2937"/>
                 </a:solidFill>
@@ -26674,7 +26674,7 @@
               </a:rPr>
               <a:t>9</a:t>
             </a:r>
-            <a:endParaRPr lang="ko-KR" sz="1200" dirty="0"/>
+            <a:endParaRPr lang="ko-KR" sz="1900" dirty="0"/>
           </a:p>
         </p:txBody>
       </p:sp>
@@ -26686,7 +26686,7 @@
         </p:nvSpPr>
         <p:spPr>
           <a:xfrm>
-            <a:off x="8432883" y="1603858"/>
+            <a:off x="8276823" y="1855260"/>
             <a:ext cx="548640" cy="365760"/>
           </a:xfrm>
           <a:prstGeom prst="rect">
@@ -26703,7 +26703,7 @@
               <a:buNone/>
             </a:pPr>
             <a:r>
-              <a:rPr lang="ko-KR" altLang="en-US" sz="1200" b="1" dirty="0">
+              <a:rPr lang="ko-KR" altLang="en-US" sz="1900" b="1" dirty="0">
                 <a:solidFill>
                   <a:srgbClr val="1F2937"/>
                 </a:solidFill>
@@ -26713,7 +26713,7 @@
               </a:rPr>
               <a:t>10</a:t>
             </a:r>
-            <a:endParaRPr lang="ko-KR" sz="1200" dirty="0"/>
+            <a:endParaRPr lang="ko-KR" sz="1900" dirty="0"/>
           </a:p>
         </p:txBody>
       </p:sp>
@@ -26725,7 +26725,7 @@
         </p:nvSpPr>
         <p:spPr>
           <a:xfrm>
-            <a:off x="8631022" y="1405719"/>
+            <a:off x="8617248" y="1514835"/>
             <a:ext cx="548640" cy="365760"/>
           </a:xfrm>
           <a:prstGeom prst="rect">
@@ -26742,7 +26742,7 @@
               <a:buNone/>
             </a:pPr>
             <a:r>
-              <a:rPr lang="ko-KR" altLang="en-US" sz="1200" b="1" dirty="0">
+              <a:rPr lang="ko-KR" altLang="en-US" sz="1900" b="1" dirty="0">
                 <a:solidFill>
                   <a:srgbClr val="1F2937"/>
                 </a:solidFill>
@@ -26752,7 +26752,7 @@
               </a:rPr>
               <a:t>11</a:t>
             </a:r>
-            <a:endParaRPr lang="ko-KR" sz="1200" dirty="0"/>
+            <a:endParaRPr lang="ko-KR" sz="1900" dirty="0"/>
           </a:p>
         </p:txBody>
       </p:sp>
@@ -26764,7 +26764,7 @@
         </p:nvSpPr>
         <p:spPr>
           <a:xfrm>
-            <a:off x="8901684" y="1333195"/>
+            <a:off x="9082278" y="1390231"/>
             <a:ext cx="548640" cy="365760"/>
           </a:xfrm>
           <a:prstGeom prst="rect">
@@ -26781,7 +26781,7 @@
               <a:buNone/>
             </a:pPr>
             <a:r>
-              <a:rPr lang="ko-KR" altLang="en-US" sz="1200" b="1" dirty="0">
+              <a:rPr lang="ko-KR" altLang="en-US" sz="1900" b="1" dirty="0">
                 <a:solidFill>
                   <a:srgbClr val="1F2937"/>
                 </a:solidFill>
@@ -26791,7 +26791,7 @@
               </a:rPr>
               <a:t>12</a:t>
             </a:r>
-            <a:endParaRPr lang="ko-KR" sz="1200" dirty="0"/>
+            <a:endParaRPr lang="ko-KR" sz="1900" dirty="0"/>
           </a:p>
         </p:txBody>
       </p:sp>
@@ -26803,8 +26803,8 @@
         </p:nvSpPr>
         <p:spPr>
           <a:xfrm flipH="1">
-            <a:off x="8917373" y="2057400"/>
-            <a:ext cx="258631" cy="258631"/>
+            <a:off x="8990311" y="2503170"/>
+            <a:ext cx="366287" cy="366287"/>
           </a:xfrm>
           <a:prstGeom prst="line">
             <a:avLst/>
@@ -26826,8 +26826,8 @@
         </p:nvSpPr>
         <p:spPr>
           <a:xfrm>
-            <a:off x="9176004" y="2057400"/>
-            <a:ext cx="0" cy="570586"/>
+            <a:off x="9356598" y="2503170"/>
+            <a:ext cx="0" cy="753466"/>
           </a:xfrm>
           <a:prstGeom prst="line">
             <a:avLst/>
@@ -26849,7 +26849,7 @@
         </p:nvSpPr>
         <p:spPr>
           <a:xfrm>
-            <a:off x="9121140" y="2002536"/>
+            <a:off x="9301734" y="2448306"/>
             <a:ext cx="109728" cy="109728"/>
           </a:xfrm>
           <a:prstGeom prst="ellipse">
@@ -28693,7 +28693,7 @@
         </p:nvSpPr>
         <p:spPr>
           <a:xfrm>
-            <a:off x="3450415" y="2308901"/>
+            <a:off x="3483835" y="2251015"/>
             <a:ext cx="548640" cy="365760"/>
           </a:xfrm>
           <a:prstGeom prst="rect">
@@ -28732,7 +28732,7 @@
         </p:nvSpPr>
         <p:spPr>
           <a:xfrm>
-            <a:off x="3812499" y="2670985"/>
+            <a:off x="3870385" y="2637565"/>
             <a:ext cx="548640" cy="365760"/>
           </a:xfrm>
           <a:prstGeom prst="rect">
@@ -28771,7 +28771,7 @@
         </p:nvSpPr>
         <p:spPr>
           <a:xfrm>
-            <a:off x="3945031" y="3165602"/>
+            <a:off x="4011872" y="3165602"/>
             <a:ext cx="548640" cy="365760"/>
           </a:xfrm>
           <a:prstGeom prst="rect">
@@ -28810,7 +28810,7 @@
         </p:nvSpPr>
         <p:spPr>
           <a:xfrm>
-            <a:off x="3812499" y="3660219"/>
+            <a:off x="3870385" y="3693639"/>
             <a:ext cx="548640" cy="365760"/>
           </a:xfrm>
           <a:prstGeom prst="rect">
@@ -28849,7 +28849,7 @@
         </p:nvSpPr>
         <p:spPr>
           <a:xfrm>
-            <a:off x="3450415" y="4022303"/>
+            <a:off x="3483835" y="4080189"/>
             <a:ext cx="548640" cy="365760"/>
           </a:xfrm>
           <a:prstGeom prst="rect">
@@ -28888,7 +28888,7 @@
         </p:nvSpPr>
         <p:spPr>
           <a:xfrm>
-            <a:off x="2955798" y="4154835"/>
+            <a:off x="2955798" y="4221676"/>
             <a:ext cx="548640" cy="365760"/>
           </a:xfrm>
           <a:prstGeom prst="rect">
@@ -28927,7 +28927,7 @@
         </p:nvSpPr>
         <p:spPr>
           <a:xfrm>
-            <a:off x="2461181" y="4022303"/>
+            <a:off x="2427761" y="4080189"/>
             <a:ext cx="548640" cy="365760"/>
           </a:xfrm>
           <a:prstGeom prst="rect">
@@ -28966,7 +28966,7 @@
         </p:nvSpPr>
         <p:spPr>
           <a:xfrm>
-            <a:off x="2099097" y="3660219"/>
+            <a:off x="2041211" y="3693639"/>
             <a:ext cx="548640" cy="365760"/>
           </a:xfrm>
           <a:prstGeom prst="rect">
@@ -29005,7 +29005,7 @@
         </p:nvSpPr>
         <p:spPr>
           <a:xfrm>
-            <a:off x="1966565" y="3165602"/>
+            <a:off x="1899724" y="3165602"/>
             <a:ext cx="548640" cy="365760"/>
           </a:xfrm>
           <a:prstGeom prst="rect">
@@ -29044,7 +29044,7 @@
         </p:nvSpPr>
         <p:spPr>
           <a:xfrm>
-            <a:off x="2099097" y="2670985"/>
+            <a:off x="2041211" y="2637565"/>
             <a:ext cx="548640" cy="365760"/>
           </a:xfrm>
           <a:prstGeom prst="rect">
@@ -29083,7 +29083,7 @@
         </p:nvSpPr>
         <p:spPr>
           <a:xfrm>
-            <a:off x="2461181" y="2308901"/>
+            <a:off x="2427761" y="2251015"/>
             <a:ext cx="548640" cy="365760"/>
           </a:xfrm>
           <a:prstGeom prst="rect">
@@ -29122,7 +29122,7 @@
         </p:nvSpPr>
         <p:spPr>
           <a:xfrm>
-            <a:off x="2955798" y="2176369"/>
+            <a:off x="2955798" y="2109528"/>
             <a:ext cx="548640" cy="365760"/>
           </a:xfrm>
           <a:prstGeom prst="rect">
@@ -29161,8 +29161,8 @@
         </p:nvSpPr>
         <p:spPr>
           <a:xfrm flipV="1">
-            <a:off x="3230118" y="3092696"/>
-            <a:ext cx="617522" cy="255786"/>
+            <a:off x="3230118" y="3123390"/>
+            <a:ext cx="543419" cy="225092"/>
           </a:xfrm>
           <a:prstGeom prst="line">
             <a:avLst/>
@@ -29185,7 +29185,7 @@
         <p:spPr>
           <a:xfrm>
             <a:off x="3230118" y="3348482"/>
-            <a:ext cx="1042706" cy="0"/>
+            <a:ext cx="855553" cy="0"/>
           </a:xfrm>
           <a:prstGeom prst="line">
             <a:avLst/>
@@ -30928,7 +30928,7 @@
         </p:nvSpPr>
         <p:spPr>
           <a:xfrm>
-            <a:off x="9903226" y="3232898"/>
+            <a:off x="9942088" y="3165587"/>
             <a:ext cx="548640" cy="365760"/>
           </a:xfrm>
           <a:prstGeom prst="rect">
@@ -30967,7 +30967,7 @@
         </p:nvSpPr>
         <p:spPr>
           <a:xfrm>
-            <a:off x="10324271" y="3653942"/>
+            <a:off x="10391582" y="3615080"/>
             <a:ext cx="548640" cy="365760"/>
           </a:xfrm>
           <a:prstGeom prst="rect">
@@ -31006,7 +31006,7 @@
         </p:nvSpPr>
         <p:spPr>
           <a:xfrm>
-            <a:off x="10478384" y="4229100"/>
+            <a:off x="10556108" y="4229100"/>
             <a:ext cx="548640" cy="365760"/>
           </a:xfrm>
           <a:prstGeom prst="rect">
@@ -31045,7 +31045,7 @@
         </p:nvSpPr>
         <p:spPr>
           <a:xfrm>
-            <a:off x="10324271" y="4804258"/>
+            <a:off x="10391582" y="4843120"/>
             <a:ext cx="548640" cy="365760"/>
           </a:xfrm>
           <a:prstGeom prst="rect">
@@ -31084,7 +31084,7 @@
         </p:nvSpPr>
         <p:spPr>
           <a:xfrm>
-            <a:off x="9903226" y="5225302"/>
+            <a:off x="9942088" y="5292613"/>
             <a:ext cx="548640" cy="365760"/>
           </a:xfrm>
           <a:prstGeom prst="rect">
@@ -31123,7 +31123,7 @@
         </p:nvSpPr>
         <p:spPr>
           <a:xfrm>
-            <a:off x="9328069" y="5379415"/>
+            <a:off x="9328069" y="5457139"/>
             <a:ext cx="548640" cy="365760"/>
           </a:xfrm>
           <a:prstGeom prst="rect">
@@ -31162,7 +31162,7 @@
         </p:nvSpPr>
         <p:spPr>
           <a:xfrm>
-            <a:off x="8752911" y="5225302"/>
+            <a:off x="8714049" y="5292613"/>
             <a:ext cx="548640" cy="365760"/>
           </a:xfrm>
           <a:prstGeom prst="rect">
@@ -31201,7 +31201,7 @@
         </p:nvSpPr>
         <p:spPr>
           <a:xfrm>
-            <a:off x="8331867" y="4804258"/>
+            <a:off x="8264556" y="4843120"/>
             <a:ext cx="548640" cy="365760"/>
           </a:xfrm>
           <a:prstGeom prst="rect">
@@ -31240,7 +31240,7 @@
         </p:nvSpPr>
         <p:spPr>
           <a:xfrm>
-            <a:off x="8177754" y="4229100"/>
+            <a:off x="8100030" y="4229100"/>
             <a:ext cx="548640" cy="365760"/>
           </a:xfrm>
           <a:prstGeom prst="rect">
@@ -31279,7 +31279,7 @@
         </p:nvSpPr>
         <p:spPr>
           <a:xfrm>
-            <a:off x="8331867" y="3653942"/>
+            <a:off x="8264556" y="3615080"/>
             <a:ext cx="548640" cy="365760"/>
           </a:xfrm>
           <a:prstGeom prst="rect">
@@ -31318,7 +31318,7 @@
         </p:nvSpPr>
         <p:spPr>
           <a:xfrm>
-            <a:off x="8752911" y="3232898"/>
+            <a:off x="8714049" y="3165587"/>
             <a:ext cx="548640" cy="365760"/>
           </a:xfrm>
           <a:prstGeom prst="rect">
@@ -31357,7 +31357,7 @@
         </p:nvSpPr>
         <p:spPr>
           <a:xfrm>
-            <a:off x="9328069" y="3078785"/>
+            <a:off x="9328069" y="3001061"/>
             <a:ext cx="548640" cy="365760"/>
           </a:xfrm>
           <a:prstGeom prst="rect">
@@ -31397,7 +31397,7 @@
         <p:spPr>
           <a:xfrm>
             <a:off x="9602389" y="4411980"/>
-            <a:ext cx="525096" cy="573041"/>
+            <a:ext cx="462084" cy="504276"/>
           </a:xfrm>
           <a:prstGeom prst="line">
             <a:avLst/>
@@ -31419,8 +31419,8 @@
         </p:nvSpPr>
         <p:spPr>
           <a:xfrm flipH="1">
-            <a:off x="8996142" y="4411980"/>
-            <a:ext cx="606247" cy="1050051"/>
+            <a:off x="9104955" y="4411980"/>
+            <a:ext cx="497434" cy="861580"/>
           </a:xfrm>
           <a:prstGeom prst="line">
             <a:avLst/>
@@ -33366,7 +33366,7 @@
         </p:nvSpPr>
         <p:spPr>
           <a:xfrm>
-            <a:off x="3450415" y="2308901"/>
+            <a:off x="3483835" y="2251015"/>
             <a:ext cx="548640" cy="365760"/>
           </a:xfrm>
           <a:prstGeom prst="rect">
@@ -33405,7 +33405,7 @@
         </p:nvSpPr>
         <p:spPr>
           <a:xfrm>
-            <a:off x="3812499" y="2670985"/>
+            <a:off x="3870385" y="2637565"/>
             <a:ext cx="548640" cy="365760"/>
           </a:xfrm>
           <a:prstGeom prst="rect">
@@ -33444,7 +33444,7 @@
         </p:nvSpPr>
         <p:spPr>
           <a:xfrm>
-            <a:off x="3945031" y="3165602"/>
+            <a:off x="4011872" y="3165602"/>
             <a:ext cx="548640" cy="365760"/>
           </a:xfrm>
           <a:prstGeom prst="rect">
@@ -33483,7 +33483,7 @@
         </p:nvSpPr>
         <p:spPr>
           <a:xfrm>
-            <a:off x="3812499" y="3660219"/>
+            <a:off x="3870385" y="3693639"/>
             <a:ext cx="548640" cy="365760"/>
           </a:xfrm>
           <a:prstGeom prst="rect">
@@ -33522,7 +33522,7 @@
         </p:nvSpPr>
         <p:spPr>
           <a:xfrm>
-            <a:off x="3450415" y="4022303"/>
+            <a:off x="3483835" y="4080189"/>
             <a:ext cx="548640" cy="365760"/>
           </a:xfrm>
           <a:prstGeom prst="rect">
@@ -33561,7 +33561,7 @@
         </p:nvSpPr>
         <p:spPr>
           <a:xfrm>
-            <a:off x="2955798" y="4154835"/>
+            <a:off x="2955798" y="4221676"/>
             <a:ext cx="548640" cy="365760"/>
           </a:xfrm>
           <a:prstGeom prst="rect">
@@ -33600,7 +33600,7 @@
         </p:nvSpPr>
         <p:spPr>
           <a:xfrm>
-            <a:off x="2461181" y="4022303"/>
+            <a:off x="2427761" y="4080189"/>
             <a:ext cx="548640" cy="365760"/>
           </a:xfrm>
           <a:prstGeom prst="rect">
@@ -33639,7 +33639,7 @@
         </p:nvSpPr>
         <p:spPr>
           <a:xfrm>
-            <a:off x="2099097" y="3660219"/>
+            <a:off x="2041211" y="3693639"/>
             <a:ext cx="548640" cy="365760"/>
           </a:xfrm>
           <a:prstGeom prst="rect">
@@ -33678,7 +33678,7 @@
         </p:nvSpPr>
         <p:spPr>
           <a:xfrm>
-            <a:off x="1966565" y="3165602"/>
+            <a:off x="1899724" y="3165602"/>
             <a:ext cx="548640" cy="365760"/>
           </a:xfrm>
           <a:prstGeom prst="rect">
@@ -33717,7 +33717,7 @@
         </p:nvSpPr>
         <p:spPr>
           <a:xfrm>
-            <a:off x="2099097" y="2670985"/>
+            <a:off x="2041211" y="2637565"/>
             <a:ext cx="548640" cy="365760"/>
           </a:xfrm>
           <a:prstGeom prst="rect">
@@ -33756,7 +33756,7 @@
         </p:nvSpPr>
         <p:spPr>
           <a:xfrm>
-            <a:off x="2461181" y="2308901"/>
+            <a:off x="2427761" y="2251015"/>
             <a:ext cx="548640" cy="365760"/>
           </a:xfrm>
           <a:prstGeom prst="rect">
@@ -33795,7 +33795,7 @@
         </p:nvSpPr>
         <p:spPr>
           <a:xfrm>
-            <a:off x="2955798" y="2176369"/>
+            <a:off x="2955798" y="2109528"/>
             <a:ext cx="548640" cy="365760"/>
           </a:xfrm>
           <a:prstGeom prst="rect">
@@ -33834,8 +33834,8 @@
         </p:nvSpPr>
         <p:spPr>
           <a:xfrm flipH="1" flipV="1">
-            <a:off x="2569059" y="3249686"/>
-            <a:ext cx="661059" cy="98796"/>
+            <a:off x="2648386" y="3261542"/>
+            <a:ext cx="581732" cy="86940"/>
           </a:xfrm>
           <a:prstGeom prst="line">
             <a:avLst/>
@@ -33858,7 +33858,7 @@
         <p:spPr>
           <a:xfrm>
             <a:off x="3230118" y="3348482"/>
-            <a:ext cx="1019920" cy="216791"/>
+            <a:ext cx="836857" cy="177880"/>
           </a:xfrm>
           <a:prstGeom prst="line">
             <a:avLst/>
@@ -35631,7 +35631,7 @@
         </p:nvSpPr>
         <p:spPr>
           <a:xfrm>
-            <a:off x="2591410" y="1784717"/>
+            <a:off x="2630272" y="1717406"/>
             <a:ext cx="548640" cy="365760"/>
           </a:xfrm>
           <a:prstGeom prst="rect">
@@ -35670,7 +35670,7 @@
         </p:nvSpPr>
         <p:spPr>
           <a:xfrm>
-            <a:off x="3012454" y="2205761"/>
+            <a:off x="3079765" y="2166899"/>
             <a:ext cx="548640" cy="365760"/>
           </a:xfrm>
           <a:prstGeom prst="rect">
@@ -35709,7 +35709,7 @@
         </p:nvSpPr>
         <p:spPr>
           <a:xfrm>
-            <a:off x="3166567" y="2780919"/>
+            <a:off x="3244291" y="2780919"/>
             <a:ext cx="548640" cy="365760"/>
           </a:xfrm>
           <a:prstGeom prst="rect">
@@ -35748,7 +35748,7 @@
         </p:nvSpPr>
         <p:spPr>
           <a:xfrm>
-            <a:off x="3012454" y="3356077"/>
+            <a:off x="3079765" y="3394939"/>
             <a:ext cx="548640" cy="365760"/>
           </a:xfrm>
           <a:prstGeom prst="rect">
@@ -35787,7 +35787,7 @@
         </p:nvSpPr>
         <p:spPr>
           <a:xfrm>
-            <a:off x="2591410" y="3777121"/>
+            <a:off x="2630272" y="3844432"/>
             <a:ext cx="548640" cy="365760"/>
           </a:xfrm>
           <a:prstGeom prst="rect">
@@ -35826,7 +35826,7 @@
         </p:nvSpPr>
         <p:spPr>
           <a:xfrm>
-            <a:off x="2016252" y="3931234"/>
+            <a:off x="2016252" y="4008958"/>
             <a:ext cx="548640" cy="365760"/>
           </a:xfrm>
           <a:prstGeom prst="rect">
@@ -35865,7 +35865,7 @@
         </p:nvSpPr>
         <p:spPr>
           <a:xfrm>
-            <a:off x="1441094" y="3777121"/>
+            <a:off x="1402232" y="3844432"/>
             <a:ext cx="548640" cy="365760"/>
           </a:xfrm>
           <a:prstGeom prst="rect">
@@ -35904,7 +35904,7 @@
         </p:nvSpPr>
         <p:spPr>
           <a:xfrm>
-            <a:off x="1020050" y="3356077"/>
+            <a:off x="952739" y="3394939"/>
             <a:ext cx="548640" cy="365760"/>
           </a:xfrm>
           <a:prstGeom prst="rect">
@@ -35943,7 +35943,7 @@
         </p:nvSpPr>
         <p:spPr>
           <a:xfrm>
-            <a:off x="865937" y="2780919"/>
+            <a:off x="788213" y="2780919"/>
             <a:ext cx="548640" cy="365760"/>
           </a:xfrm>
           <a:prstGeom prst="rect">
@@ -35982,7 +35982,7 @@
         </p:nvSpPr>
         <p:spPr>
           <a:xfrm>
-            <a:off x="1020050" y="2205761"/>
+            <a:off x="952739" y="2166899"/>
             <a:ext cx="548640" cy="365760"/>
           </a:xfrm>
           <a:prstGeom prst="rect">
@@ -36021,7 +36021,7 @@
         </p:nvSpPr>
         <p:spPr>
           <a:xfrm>
-            <a:off x="1441094" y="1784717"/>
+            <a:off x="1402232" y="1717406"/>
             <a:ext cx="548640" cy="365760"/>
           </a:xfrm>
           <a:prstGeom prst="rect">
@@ -36060,7 +36060,7 @@
         </p:nvSpPr>
         <p:spPr>
           <a:xfrm>
-            <a:off x="2016252" y="1630604"/>
+            <a:off x="2016252" y="1552880"/>
             <a:ext cx="548640" cy="365760"/>
           </a:xfrm>
           <a:prstGeom prst="rect">
@@ -36099,8 +36099,8 @@
         </p:nvSpPr>
         <p:spPr>
           <a:xfrm flipH="1">
-            <a:off x="2155606" y="2963799"/>
-            <a:ext cx="134966" cy="765432"/>
+            <a:off x="2171802" y="2963799"/>
+            <a:ext cx="118770" cy="673580"/>
           </a:xfrm>
           <a:prstGeom prst="line">
             <a:avLst/>
@@ -36123,7 +36123,7 @@
         <p:spPr>
           <a:xfrm>
             <a:off x="2290572" y="2963799"/>
-            <a:ext cx="1050051" cy="606247"/>
+            <a:ext cx="861580" cy="497434"/>
           </a:xfrm>
           <a:prstGeom prst="line">
             <a:avLst/>
@@ -37614,7 +37614,7 @@
         </p:nvSpPr>
         <p:spPr>
           <a:xfrm>
-            <a:off x="6395314" y="1784717"/>
+            <a:off x="6434176" y="1717406"/>
             <a:ext cx="548640" cy="365760"/>
           </a:xfrm>
           <a:prstGeom prst="rect">
@@ -37653,7 +37653,7 @@
         </p:nvSpPr>
         <p:spPr>
           <a:xfrm>
-            <a:off x="6816358" y="2205761"/>
+            <a:off x="6883669" y="2166899"/>
             <a:ext cx="548640" cy="365760"/>
           </a:xfrm>
           <a:prstGeom prst="rect">
@@ -37692,7 +37692,7 @@
         </p:nvSpPr>
         <p:spPr>
           <a:xfrm>
-            <a:off x="6970471" y="2780919"/>
+            <a:off x="7048195" y="2780919"/>
             <a:ext cx="548640" cy="365760"/>
           </a:xfrm>
           <a:prstGeom prst="rect">
@@ -37731,7 +37731,7 @@
         </p:nvSpPr>
         <p:spPr>
           <a:xfrm>
-            <a:off x="6816358" y="3356077"/>
+            <a:off x="6883669" y="3394939"/>
             <a:ext cx="548640" cy="365760"/>
           </a:xfrm>
           <a:prstGeom prst="rect">
@@ -37770,7 +37770,7 @@
         </p:nvSpPr>
         <p:spPr>
           <a:xfrm>
-            <a:off x="6395314" y="3777121"/>
+            <a:off x="6434176" y="3844432"/>
             <a:ext cx="548640" cy="365760"/>
           </a:xfrm>
           <a:prstGeom prst="rect">
@@ -37809,7 +37809,7 @@
         </p:nvSpPr>
         <p:spPr>
           <a:xfrm>
-            <a:off x="5820156" y="3931234"/>
+            <a:off x="5820156" y="4008958"/>
             <a:ext cx="548640" cy="365760"/>
           </a:xfrm>
           <a:prstGeom prst="rect">
@@ -37848,7 +37848,7 @@
         </p:nvSpPr>
         <p:spPr>
           <a:xfrm>
-            <a:off x="5244998" y="3777121"/>
+            <a:off x="5206136" y="3844432"/>
             <a:ext cx="548640" cy="365760"/>
           </a:xfrm>
           <a:prstGeom prst="rect">
@@ -37887,7 +37887,7 @@
         </p:nvSpPr>
         <p:spPr>
           <a:xfrm>
-            <a:off x="4823954" y="3356077"/>
+            <a:off x="4756643" y="3394939"/>
             <a:ext cx="548640" cy="365760"/>
           </a:xfrm>
           <a:prstGeom prst="rect">
@@ -37926,7 +37926,7 @@
         </p:nvSpPr>
         <p:spPr>
           <a:xfrm>
-            <a:off x="4669841" y="2780919"/>
+            <a:off x="4592117" y="2780919"/>
             <a:ext cx="548640" cy="365760"/>
           </a:xfrm>
           <a:prstGeom prst="rect">
@@ -37965,7 +37965,7 @@
         </p:nvSpPr>
         <p:spPr>
           <a:xfrm>
-            <a:off x="4823954" y="2205761"/>
+            <a:off x="4756643" y="2166899"/>
             <a:ext cx="548640" cy="365760"/>
           </a:xfrm>
           <a:prstGeom prst="rect">
@@ -38004,7 +38004,7 @@
         </p:nvSpPr>
         <p:spPr>
           <a:xfrm>
-            <a:off x="5244998" y="1784717"/>
+            <a:off x="5206136" y="1717406"/>
             <a:ext cx="548640" cy="365760"/>
           </a:xfrm>
           <a:prstGeom prst="rect">
@@ -38043,7 +38043,7 @@
         </p:nvSpPr>
         <p:spPr>
           <a:xfrm>
-            <a:off x="5820156" y="1630604"/>
+            <a:off x="5820156" y="1552880"/>
             <a:ext cx="548640" cy="365760"/>
           </a:xfrm>
           <a:prstGeom prst="rect">
@@ -38082,8 +38082,8 @@
         </p:nvSpPr>
         <p:spPr>
           <a:xfrm flipH="1" flipV="1">
-            <a:off x="5993026" y="2193208"/>
-            <a:ext cx="101450" cy="770591"/>
+            <a:off x="6005200" y="2285679"/>
+            <a:ext cx="89276" cy="678120"/>
           </a:xfrm>
           <a:prstGeom prst="line">
             <a:avLst/>
@@ -38105,8 +38105,8 @@
         </p:nvSpPr>
         <p:spPr>
           <a:xfrm flipH="1">
-            <a:off x="4881982" y="2963799"/>
-            <a:ext cx="1212494" cy="0"/>
+            <a:off x="5099609" y="2963799"/>
+            <a:ext cx="994867" cy="0"/>
           </a:xfrm>
           <a:prstGeom prst="line">
             <a:avLst/>
@@ -39597,7 +39597,7 @@
         </p:nvSpPr>
         <p:spPr>
           <a:xfrm>
-            <a:off x="10199218" y="1784717"/>
+            <a:off x="10238080" y="1717406"/>
             <a:ext cx="548640" cy="365760"/>
           </a:xfrm>
           <a:prstGeom prst="rect">
@@ -39636,7 +39636,7 @@
         </p:nvSpPr>
         <p:spPr>
           <a:xfrm>
-            <a:off x="10620262" y="2205761"/>
+            <a:off x="10687573" y="2166899"/>
             <a:ext cx="548640" cy="365760"/>
           </a:xfrm>
           <a:prstGeom prst="rect">
@@ -39675,7 +39675,7 @@
         </p:nvSpPr>
         <p:spPr>
           <a:xfrm>
-            <a:off x="10774375" y="2780919"/>
+            <a:off x="10852099" y="2780919"/>
             <a:ext cx="548640" cy="365760"/>
           </a:xfrm>
           <a:prstGeom prst="rect">
@@ -39714,7 +39714,7 @@
         </p:nvSpPr>
         <p:spPr>
           <a:xfrm>
-            <a:off x="10620262" y="3356077"/>
+            <a:off x="10687573" y="3394939"/>
             <a:ext cx="548640" cy="365760"/>
           </a:xfrm>
           <a:prstGeom prst="rect">
@@ -39753,7 +39753,7 @@
         </p:nvSpPr>
         <p:spPr>
           <a:xfrm>
-            <a:off x="10199218" y="3777121"/>
+            <a:off x="10238080" y="3844432"/>
             <a:ext cx="548640" cy="365760"/>
           </a:xfrm>
           <a:prstGeom prst="rect">
@@ -39792,7 +39792,7 @@
         </p:nvSpPr>
         <p:spPr>
           <a:xfrm>
-            <a:off x="9624060" y="3931234"/>
+            <a:off x="9624060" y="4008958"/>
             <a:ext cx="548640" cy="365760"/>
           </a:xfrm>
           <a:prstGeom prst="rect">
@@ -39831,7 +39831,7 @@
         </p:nvSpPr>
         <p:spPr>
           <a:xfrm>
-            <a:off x="9048902" y="3777121"/>
+            <a:off x="9010040" y="3844432"/>
             <a:ext cx="548640" cy="365760"/>
           </a:xfrm>
           <a:prstGeom prst="rect">
@@ -39870,7 +39870,7 @@
         </p:nvSpPr>
         <p:spPr>
           <a:xfrm>
-            <a:off x="8627858" y="3356077"/>
+            <a:off x="8560547" y="3394939"/>
             <a:ext cx="548640" cy="365760"/>
           </a:xfrm>
           <a:prstGeom prst="rect">
@@ -39909,7 +39909,7 @@
         </p:nvSpPr>
         <p:spPr>
           <a:xfrm>
-            <a:off x="8473745" y="2780919"/>
+            <a:off x="8396021" y="2780919"/>
             <a:ext cx="548640" cy="365760"/>
           </a:xfrm>
           <a:prstGeom prst="rect">
@@ -39948,7 +39948,7 @@
         </p:nvSpPr>
         <p:spPr>
           <a:xfrm>
-            <a:off x="8627858" y="2205761"/>
+            <a:off x="8560547" y="2166899"/>
             <a:ext cx="548640" cy="365760"/>
           </a:xfrm>
           <a:prstGeom prst="rect">
@@ -39987,7 +39987,7 @@
         </p:nvSpPr>
         <p:spPr>
           <a:xfrm>
-            <a:off x="9048902" y="1784717"/>
+            <a:off x="9010040" y="1717406"/>
             <a:ext cx="548640" cy="365760"/>
           </a:xfrm>
           <a:prstGeom prst="rect">
@@ -40026,7 +40026,7 @@
         </p:nvSpPr>
         <p:spPr>
           <a:xfrm>
-            <a:off x="9624060" y="1630604"/>
+            <a:off x="9624060" y="1552880"/>
             <a:ext cx="548640" cy="365760"/>
           </a:xfrm>
           <a:prstGeom prst="rect">
@@ -40065,8 +40065,8 @@
         </p:nvSpPr>
         <p:spPr>
           <a:xfrm flipV="1">
-            <a:off x="9898380" y="2623079"/>
-            <a:ext cx="698579" cy="340720"/>
+            <a:off x="9898380" y="2663966"/>
+            <a:ext cx="614749" cy="299833"/>
           </a:xfrm>
           <a:prstGeom prst="line">
             <a:avLst/>
@@ -40088,8 +40088,8 @@
         </p:nvSpPr>
         <p:spPr>
           <a:xfrm flipV="1">
-            <a:off x="9898380" y="2152482"/>
-            <a:ext cx="901059" cy="811317"/>
+            <a:off x="9898380" y="2298103"/>
+            <a:ext cx="739330" cy="665696"/>
           </a:xfrm>
           <a:prstGeom prst="line">
             <a:avLst/>
@@ -41810,7 +41810,7 @@
         </p:nvSpPr>
         <p:spPr>
           <a:xfrm>
-            <a:off x="3431055" y="2335829"/>
+            <a:off x="3463167" y="2280209"/>
             <a:ext cx="548640" cy="365760"/>
           </a:xfrm>
           <a:prstGeom prst="rect">
@@ -41849,7 +41849,7 @@
         </p:nvSpPr>
         <p:spPr>
           <a:xfrm>
-            <a:off x="3778967" y="2683741"/>
+            <a:off x="3834587" y="2651629"/>
             <a:ext cx="548640" cy="365760"/>
           </a:xfrm>
           <a:prstGeom prst="rect">
@@ -41888,7 +41888,7 @@
         </p:nvSpPr>
         <p:spPr>
           <a:xfrm>
-            <a:off x="3906312" y="3158998"/>
+            <a:off x="3970536" y="3158998"/>
             <a:ext cx="548640" cy="365760"/>
           </a:xfrm>
           <a:prstGeom prst="rect">
@@ -41927,7 +41927,7 @@
         </p:nvSpPr>
         <p:spPr>
           <a:xfrm>
-            <a:off x="3778967" y="3634255"/>
+            <a:off x="3834587" y="3666367"/>
             <a:ext cx="548640" cy="365760"/>
           </a:xfrm>
           <a:prstGeom prst="rect">
@@ -41966,7 +41966,7 @@
         </p:nvSpPr>
         <p:spPr>
           <a:xfrm>
-            <a:off x="3431055" y="3982167"/>
+            <a:off x="3463167" y="4037787"/>
             <a:ext cx="548640" cy="365760"/>
           </a:xfrm>
           <a:prstGeom prst="rect">
@@ -42005,7 +42005,7 @@
         </p:nvSpPr>
         <p:spPr>
           <a:xfrm>
-            <a:off x="2955798" y="4109512"/>
+            <a:off x="2955798" y="4173736"/>
             <a:ext cx="548640" cy="365760"/>
           </a:xfrm>
           <a:prstGeom prst="rect">
@@ -42044,7 +42044,7 @@
         </p:nvSpPr>
         <p:spPr>
           <a:xfrm>
-            <a:off x="2480541" y="3982167"/>
+            <a:off x="2448429" y="4037787"/>
             <a:ext cx="548640" cy="365760"/>
           </a:xfrm>
           <a:prstGeom prst="rect">
@@ -42083,7 +42083,7 @@
         </p:nvSpPr>
         <p:spPr>
           <a:xfrm>
-            <a:off x="2132629" y="3634255"/>
+            <a:off x="2077009" y="3666367"/>
             <a:ext cx="548640" cy="365760"/>
           </a:xfrm>
           <a:prstGeom prst="rect">
@@ -42122,7 +42122,7 @@
         </p:nvSpPr>
         <p:spPr>
           <a:xfrm>
-            <a:off x="2005284" y="3158998"/>
+            <a:off x="1941060" y="3158998"/>
             <a:ext cx="548640" cy="365760"/>
           </a:xfrm>
           <a:prstGeom prst="rect">
@@ -42161,7 +42161,7 @@
         </p:nvSpPr>
         <p:spPr>
           <a:xfrm>
-            <a:off x="2132629" y="2683741"/>
+            <a:off x="2077009" y="2651629"/>
             <a:ext cx="548640" cy="365760"/>
           </a:xfrm>
           <a:prstGeom prst="rect">
@@ -42200,7 +42200,7 @@
         </p:nvSpPr>
         <p:spPr>
           <a:xfrm>
-            <a:off x="2480541" y="2335829"/>
+            <a:off x="2448429" y="2280209"/>
             <a:ext cx="548640" cy="365760"/>
           </a:xfrm>
           <a:prstGeom prst="rect">
@@ -42239,7 +42239,7 @@
         </p:nvSpPr>
         <p:spPr>
           <a:xfrm>
-            <a:off x="2955798" y="2208484"/>
+            <a:off x="2955798" y="2144260"/>
             <a:ext cx="548640" cy="365760"/>
           </a:xfrm>
           <a:prstGeom prst="rect">
@@ -42278,8 +42278,8 @@
         </p:nvSpPr>
         <p:spPr>
           <a:xfrm flipH="1">
-            <a:off x="2704027" y="3341878"/>
-            <a:ext cx="526091" cy="368373"/>
+            <a:off x="2767158" y="3341878"/>
+            <a:ext cx="462960" cy="324168"/>
           </a:xfrm>
           <a:prstGeom prst="line">
             <a:avLst/>
@@ -42301,8 +42301,8 @@
         </p:nvSpPr>
         <p:spPr>
           <a:xfrm flipH="1" flipV="1">
-            <a:off x="2362453" y="2840932"/>
-            <a:ext cx="867665" cy="500946"/>
+            <a:off x="2518188" y="2930845"/>
+            <a:ext cx="711930" cy="411033"/>
           </a:xfrm>
           <a:prstGeom prst="line">
             <a:avLst/>
@@ -43840,7 +43840,7 @@
         </p:nvSpPr>
         <p:spPr>
           <a:xfrm>
-            <a:off x="9159771" y="2335829"/>
+            <a:off x="9191883" y="2280209"/>
             <a:ext cx="548640" cy="365760"/>
           </a:xfrm>
           <a:prstGeom prst="rect">
@@ -43879,7 +43879,7 @@
         </p:nvSpPr>
         <p:spPr>
           <a:xfrm>
-            <a:off x="9507683" y="2683741"/>
+            <a:off x="9563303" y="2651629"/>
             <a:ext cx="548640" cy="365760"/>
           </a:xfrm>
           <a:prstGeom prst="rect">
@@ -43918,7 +43918,7 @@
         </p:nvSpPr>
         <p:spPr>
           <a:xfrm>
-            <a:off x="9635028" y="3158998"/>
+            <a:off x="9699252" y="3158998"/>
             <a:ext cx="548640" cy="365760"/>
           </a:xfrm>
           <a:prstGeom prst="rect">
@@ -43957,7 +43957,7 @@
         </p:nvSpPr>
         <p:spPr>
           <a:xfrm>
-            <a:off x="9507683" y="3634255"/>
+            <a:off x="9563303" y="3666367"/>
             <a:ext cx="548640" cy="365760"/>
           </a:xfrm>
           <a:prstGeom prst="rect">
@@ -43996,7 +43996,7 @@
         </p:nvSpPr>
         <p:spPr>
           <a:xfrm>
-            <a:off x="9159771" y="3982167"/>
+            <a:off x="9191883" y="4037787"/>
             <a:ext cx="548640" cy="365760"/>
           </a:xfrm>
           <a:prstGeom prst="rect">
@@ -44035,7 +44035,7 @@
         </p:nvSpPr>
         <p:spPr>
           <a:xfrm>
-            <a:off x="8684514" y="4109512"/>
+            <a:off x="8684514" y="4173736"/>
             <a:ext cx="548640" cy="365760"/>
           </a:xfrm>
           <a:prstGeom prst="rect">
@@ -44074,7 +44074,7 @@
         </p:nvSpPr>
         <p:spPr>
           <a:xfrm>
-            <a:off x="8209257" y="3982167"/>
+            <a:off x="8177145" y="4037787"/>
             <a:ext cx="548640" cy="365760"/>
           </a:xfrm>
           <a:prstGeom prst="rect">
@@ -44113,7 +44113,7 @@
         </p:nvSpPr>
         <p:spPr>
           <a:xfrm>
-            <a:off x="7861345" y="3634255"/>
+            <a:off x="7805725" y="3666367"/>
             <a:ext cx="548640" cy="365760"/>
           </a:xfrm>
           <a:prstGeom prst="rect">
@@ -44152,7 +44152,7 @@
         </p:nvSpPr>
         <p:spPr>
           <a:xfrm>
-            <a:off x="7734000" y="3158998"/>
+            <a:off x="7669776" y="3158998"/>
             <a:ext cx="548640" cy="365760"/>
           </a:xfrm>
           <a:prstGeom prst="rect">
@@ -44191,7 +44191,7 @@
         </p:nvSpPr>
         <p:spPr>
           <a:xfrm>
-            <a:off x="7861345" y="2683741"/>
+            <a:off x="7805725" y="2651629"/>
             <a:ext cx="548640" cy="365760"/>
           </a:xfrm>
           <a:prstGeom prst="rect">
@@ -44230,7 +44230,7 @@
         </p:nvSpPr>
         <p:spPr>
           <a:xfrm>
-            <a:off x="8209257" y="2335829"/>
+            <a:off x="8177145" y="2280209"/>
             <a:ext cx="548640" cy="365760"/>
           </a:xfrm>
           <a:prstGeom prst="rect">
@@ -44269,7 +44269,7 @@
         </p:nvSpPr>
         <p:spPr>
           <a:xfrm>
-            <a:off x="8684514" y="2208484"/>
+            <a:off x="8684514" y="2144260"/>
             <a:ext cx="548640" cy="365760"/>
           </a:xfrm>
           <a:prstGeom prst="rect">
@@ -44308,8 +44308,8 @@
         </p:nvSpPr>
         <p:spPr>
           <a:xfrm flipH="1">
-            <a:off x="8432743" y="3341878"/>
-            <a:ext cx="526091" cy="368373"/>
+            <a:off x="8495874" y="3341878"/>
+            <a:ext cx="462960" cy="324168"/>
           </a:xfrm>
           <a:prstGeom prst="line">
             <a:avLst/>
@@ -44331,8 +44331,8 @@
         </p:nvSpPr>
         <p:spPr>
           <a:xfrm flipH="1" flipV="1">
-            <a:off x="8091169" y="2840932"/>
-            <a:ext cx="867665" cy="500946"/>
+            <a:off x="8246904" y="2930845"/>
+            <a:ext cx="711930" cy="411033"/>
           </a:xfrm>
           <a:prstGeom prst="line">
             <a:avLst/>
@@ -46065,7 +46065,7 @@
         </p:nvSpPr>
         <p:spPr>
           <a:xfrm>
-            <a:off x="3365844" y="2215718"/>
+            <a:off x="3392778" y="2169067"/>
             <a:ext cx="548640" cy="365760"/>
           </a:xfrm>
           <a:prstGeom prst="rect">
@@ -46104,7 +46104,7 @@
         </p:nvSpPr>
         <p:spPr>
           <a:xfrm>
-            <a:off x="3657651" y="2507525"/>
+            <a:off x="3704302" y="2480591"/>
             <a:ext cx="548640" cy="365760"/>
           </a:xfrm>
           <a:prstGeom prst="rect">
@@ -46143,7 +46143,7 @@
         </p:nvSpPr>
         <p:spPr>
           <a:xfrm>
-            <a:off x="3764460" y="2906141"/>
+            <a:off x="3818327" y="2906141"/>
             <a:ext cx="548640" cy="365760"/>
           </a:xfrm>
           <a:prstGeom prst="rect">
@@ -46182,7 +46182,7 @@
         </p:nvSpPr>
         <p:spPr>
           <a:xfrm>
-            <a:off x="3657651" y="3304757"/>
+            <a:off x="3704302" y="3331691"/>
             <a:ext cx="548640" cy="365760"/>
           </a:xfrm>
           <a:prstGeom prst="rect">
@@ -46221,7 +46221,7 @@
         </p:nvSpPr>
         <p:spPr>
           <a:xfrm>
-            <a:off x="3365844" y="3596564"/>
+            <a:off x="3392778" y="3643215"/>
             <a:ext cx="548640" cy="365760"/>
           </a:xfrm>
           <a:prstGeom prst="rect">
@@ -46260,7 +46260,7 @@
         </p:nvSpPr>
         <p:spPr>
           <a:xfrm>
-            <a:off x="2967228" y="3703373"/>
+            <a:off x="2967228" y="3757240"/>
             <a:ext cx="548640" cy="365760"/>
           </a:xfrm>
           <a:prstGeom prst="rect">
@@ -46299,7 +46299,7 @@
         </p:nvSpPr>
         <p:spPr>
           <a:xfrm>
-            <a:off x="2568612" y="3596564"/>
+            <a:off x="2541678" y="3643215"/>
             <a:ext cx="548640" cy="365760"/>
           </a:xfrm>
           <a:prstGeom prst="rect">
@@ -46338,7 +46338,7 @@
         </p:nvSpPr>
         <p:spPr>
           <a:xfrm>
-            <a:off x="2276805" y="3304757"/>
+            <a:off x="2230154" y="3331691"/>
             <a:ext cx="548640" cy="365760"/>
           </a:xfrm>
           <a:prstGeom prst="rect">
@@ -46377,7 +46377,7 @@
         </p:nvSpPr>
         <p:spPr>
           <a:xfrm>
-            <a:off x="2169996" y="2906141"/>
+            <a:off x="2116129" y="2906141"/>
             <a:ext cx="548640" cy="365760"/>
           </a:xfrm>
           <a:prstGeom prst="rect">
@@ -46416,7 +46416,7 @@
         </p:nvSpPr>
         <p:spPr>
           <a:xfrm>
-            <a:off x="2276805" y="2507525"/>
+            <a:off x="2230154" y="2480591"/>
             <a:ext cx="548640" cy="365760"/>
           </a:xfrm>
           <a:prstGeom prst="rect">
@@ -46455,7 +46455,7 @@
         </p:nvSpPr>
         <p:spPr>
           <a:xfrm>
-            <a:off x="2568612" y="2215718"/>
+            <a:off x="2541678" y="2169067"/>
             <a:ext cx="548640" cy="365760"/>
           </a:xfrm>
           <a:prstGeom prst="rect">
@@ -46494,7 +46494,7 @@
         </p:nvSpPr>
         <p:spPr>
           <a:xfrm>
-            <a:off x="2967228" y="2108909"/>
+            <a:off x="2967228" y="2055042"/>
             <a:ext cx="548640" cy="365760"/>
           </a:xfrm>
           <a:prstGeom prst="rect">
@@ -46533,8 +46533,8 @@
         </p:nvSpPr>
         <p:spPr>
           <a:xfrm flipV="1">
-            <a:off x="3241548" y="2622519"/>
-            <a:ext cx="269335" cy="466502"/>
+            <a:off x="3241548" y="2678499"/>
+            <a:ext cx="237015" cy="410522"/>
           </a:xfrm>
           <a:prstGeom prst="line">
             <a:avLst/>
@@ -46556,8 +46556,8 @@
         </p:nvSpPr>
         <p:spPr>
           <a:xfrm flipV="1">
-            <a:off x="3241548" y="2248695"/>
-            <a:ext cx="0" cy="840326"/>
+            <a:off x="3241548" y="2399523"/>
+            <a:ext cx="0" cy="689498"/>
           </a:xfrm>
           <a:prstGeom prst="line">
             <a:avLst/>
@@ -48048,7 +48048,7 @@
         </p:nvSpPr>
         <p:spPr>
           <a:xfrm>
-            <a:off x="9071700" y="2215718"/>
+            <a:off x="9098634" y="2169067"/>
             <a:ext cx="548640" cy="365760"/>
           </a:xfrm>
           <a:prstGeom prst="rect">
@@ -48087,7 +48087,7 @@
         </p:nvSpPr>
         <p:spPr>
           <a:xfrm>
-            <a:off x="9363507" y="2507525"/>
+            <a:off x="9410158" y="2480591"/>
             <a:ext cx="548640" cy="365760"/>
           </a:xfrm>
           <a:prstGeom prst="rect">
@@ -48126,7 +48126,7 @@
         </p:nvSpPr>
         <p:spPr>
           <a:xfrm>
-            <a:off x="9470316" y="2906141"/>
+            <a:off x="9524183" y="2906141"/>
             <a:ext cx="548640" cy="365760"/>
           </a:xfrm>
           <a:prstGeom prst="rect">
@@ -48165,7 +48165,7 @@
         </p:nvSpPr>
         <p:spPr>
           <a:xfrm>
-            <a:off x="9363507" y="3304757"/>
+            <a:off x="9410158" y="3331691"/>
             <a:ext cx="548640" cy="365760"/>
           </a:xfrm>
           <a:prstGeom prst="rect">
@@ -48204,7 +48204,7 @@
         </p:nvSpPr>
         <p:spPr>
           <a:xfrm>
-            <a:off x="9071700" y="3596564"/>
+            <a:off x="9098634" y="3643215"/>
             <a:ext cx="548640" cy="365760"/>
           </a:xfrm>
           <a:prstGeom prst="rect">
@@ -48243,7 +48243,7 @@
         </p:nvSpPr>
         <p:spPr>
           <a:xfrm>
-            <a:off x="8673084" y="3703373"/>
+            <a:off x="8673084" y="3757240"/>
             <a:ext cx="548640" cy="365760"/>
           </a:xfrm>
           <a:prstGeom prst="rect">
@@ -48282,7 +48282,7 @@
         </p:nvSpPr>
         <p:spPr>
           <a:xfrm>
-            <a:off x="8274468" y="3596564"/>
+            <a:off x="8247534" y="3643215"/>
             <a:ext cx="548640" cy="365760"/>
           </a:xfrm>
           <a:prstGeom prst="rect">
@@ -48321,7 +48321,7 @@
         </p:nvSpPr>
         <p:spPr>
           <a:xfrm>
-            <a:off x="7982661" y="3304757"/>
+            <a:off x="7936010" y="3331691"/>
             <a:ext cx="548640" cy="365760"/>
           </a:xfrm>
           <a:prstGeom prst="rect">
@@ -48360,7 +48360,7 @@
         </p:nvSpPr>
         <p:spPr>
           <a:xfrm>
-            <a:off x="7875852" y="2906141"/>
+            <a:off x="7821985" y="2906141"/>
             <a:ext cx="548640" cy="365760"/>
           </a:xfrm>
           <a:prstGeom prst="rect">
@@ -48399,7 +48399,7 @@
         </p:nvSpPr>
         <p:spPr>
           <a:xfrm>
-            <a:off x="7982661" y="2507525"/>
+            <a:off x="7936010" y="2480591"/>
             <a:ext cx="548640" cy="365760"/>
           </a:xfrm>
           <a:prstGeom prst="rect">
@@ -48438,7 +48438,7 @@
         </p:nvSpPr>
         <p:spPr>
           <a:xfrm>
-            <a:off x="8274468" y="2215718"/>
+            <a:off x="8247534" y="2169067"/>
             <a:ext cx="548640" cy="365760"/>
           </a:xfrm>
           <a:prstGeom prst="rect">
@@ -48477,7 +48477,7 @@
         </p:nvSpPr>
         <p:spPr>
           <a:xfrm>
-            <a:off x="8673084" y="2108909"/>
+            <a:off x="8673084" y="2055042"/>
             <a:ext cx="548640" cy="365760"/>
           </a:xfrm>
           <a:prstGeom prst="rect">
@@ -48516,8 +48516,8 @@
         </p:nvSpPr>
         <p:spPr>
           <a:xfrm flipV="1">
-            <a:off x="8947404" y="2819686"/>
-            <a:ext cx="466502" cy="269335"/>
+            <a:off x="8947404" y="2852006"/>
+            <a:ext cx="410522" cy="237015"/>
           </a:xfrm>
           <a:prstGeom prst="line">
             <a:avLst/>
@@ -48539,8 +48539,8 @@
         </p:nvSpPr>
         <p:spPr>
           <a:xfrm flipV="1">
-            <a:off x="8947404" y="2248695"/>
-            <a:ext cx="0" cy="840326"/>
+            <a:off x="8947404" y="2399523"/>
+            <a:ext cx="0" cy="689498"/>
           </a:xfrm>
           <a:prstGeom prst="line">
             <a:avLst/>

--- a/dist/초2/수학/도형과측정/초2_수학_도형과측정_05_시각과시간.pptx
+++ b/dist/초2/수학/도형과측정/초2_수학_도형과측정_05_시각과시간.pptx
@@ -122,13 +122,13 @@
   <p:extLst>
     <p:ext uri="{521415D9-36F7-43E2-AB2F-B90AF26B5E84}">
       <p14:sectionLst xmlns:p14="http://schemas.microsoft.com/office/powerpoint/2010/main">
-        <p14:section name="도입" id="{38a8cda9-17e5-002b-7275-316c718fa998}">
+        <p14:section name="도입" id="{2636e1f2-157a-dd4b-113b-8a15d507067f}">
           <p14:sldIdLst>
             <p14:sldId id="256"/>
             <p14:sldId id="257"/>
           </p14:sldIdLst>
         </p14:section>
-        <p14:section name="개념" id="{70aba676-1d9a-5447-6b47-95ba956f7d86}">
+        <p14:section name="개념" id="{85f074d4-2add-00f0-ce50-4946e10234aa}">
           <p14:sldIdLst>
             <p14:sldId id="258"/>
             <p14:sldId id="259"/>
@@ -138,32 +138,32 @@
             <p14:sldId id="265"/>
           </p14:sldIdLst>
         </p14:section>
-        <p14:section name="연습" id="{754f92ff-469b-d1e8-ce6b-2ca30af2389f}">
+        <p14:section name="연습" id="{4193bb24-dad9-a9a4-79c9-cf5d8d5ef971}">
           <p14:sldIdLst>
             <p14:sldId id="261"/>
             <p14:sldId id="262"/>
             <p14:sldId id="266"/>
           </p14:sldIdLst>
         </p14:section>
-        <p14:section name="개념" id="{387f458e-7495-cebd-f9ae-89f6b2560acf}">
+        <p14:section name="개념" id="{cbeede62-ec97-9172-a1f9-76acaf03823d}">
           <p14:sldIdLst/>
         </p14:section>
-        <p14:section name="연습" id="{e92f2bbd-0a58-e1ed-e7bb-7b3a50ce6233}">
+        <p14:section name="연습" id="{1a6431bb-c065-1bf0-4204-3b27fc8b8839}">
           <p14:sldIdLst/>
         </p14:section>
-        <p14:section name="확인" id="{47f339d0-170e-2701-5026-5b20a099d1ee}">
+        <p14:section name="확인" id="{1ae99a6b-d8cb-084b-0e46-34c5e12370e3}">
           <p14:sldIdLst>
             <p14:sldId id="267"/>
             <p14:sldId id="268"/>
             <p14:sldId id="269"/>
           </p14:sldIdLst>
         </p14:section>
-        <p14:section name="정리" id="{a1ed4a51-7361-3de6-5d09-f1b9163f4d29}">
+        <p14:section name="정리" id="{acf5cf70-a03e-ff56-f701-498cc7636229}">
           <p14:sldIdLst>
             <p14:sldId id="270"/>
           </p14:sldIdLst>
         </p14:section>
-        <p14:section name="보충" id="{7444c098-fdff-0150-6cf1-20d7f720d477}">
+        <p14:section name="보충" id="{ab3b1f2a-9f47-52b2-7df1-c6225906de2c}">
           <p14:sldIdLst>
             <p14:sldId id="271"/>
           </p14:sldIdLst>

--- a/dist/초2/수학/도형과측정/초2_수학_도형과측정_05_시각과시간.pptx
+++ b/dist/초2/수학/도형과측정/초2_수학_도형과측정_05_시각과시간.pptx
@@ -122,13 +122,13 @@
   <p:extLst>
     <p:ext uri="{521415D9-36F7-43E2-AB2F-B90AF26B5E84}">
       <p14:sectionLst xmlns:p14="http://schemas.microsoft.com/office/powerpoint/2010/main">
-        <p14:section name="도입" id="{2636e1f2-157a-dd4b-113b-8a15d507067f}">
+        <p14:section name="도입" id="{71c55be7-c519-d7a5-3bbd-1c90b77d1a84}">
           <p14:sldIdLst>
             <p14:sldId id="256"/>
             <p14:sldId id="257"/>
           </p14:sldIdLst>
         </p14:section>
-        <p14:section name="개념" id="{85f074d4-2add-00f0-ce50-4946e10234aa}">
+        <p14:section name="개념" id="{1f14a8fd-0d84-a121-243e-5470b8e3cbf4}">
           <p14:sldIdLst>
             <p14:sldId id="258"/>
             <p14:sldId id="259"/>
@@ -138,32 +138,32 @@
             <p14:sldId id="265"/>
           </p14:sldIdLst>
         </p14:section>
-        <p14:section name="연습" id="{4193bb24-dad9-a9a4-79c9-cf5d8d5ef971}">
+        <p14:section name="연습" id="{6f0ff66c-b077-2151-81cf-f831fca9e9b8}">
           <p14:sldIdLst>
             <p14:sldId id="261"/>
             <p14:sldId id="262"/>
             <p14:sldId id="266"/>
           </p14:sldIdLst>
         </p14:section>
-        <p14:section name="개념" id="{cbeede62-ec97-9172-a1f9-76acaf03823d}">
+        <p14:section name="개념" id="{dbda2f4f-60de-7927-2fc0-14392f5209f8}">
           <p14:sldIdLst/>
         </p14:section>
-        <p14:section name="연습" id="{1a6431bb-c065-1bf0-4204-3b27fc8b8839}">
+        <p14:section name="연습" id="{39aedfde-ebfd-0096-aa73-48863877d45f}">
           <p14:sldIdLst/>
         </p14:section>
-        <p14:section name="확인" id="{1ae99a6b-d8cb-084b-0e46-34c5e12370e3}">
+        <p14:section name="확인" id="{e6e37f91-a0f7-24d1-230e-f558444e9758}">
           <p14:sldIdLst>
             <p14:sldId id="267"/>
             <p14:sldId id="268"/>
             <p14:sldId id="269"/>
           </p14:sldIdLst>
         </p14:section>
-        <p14:section name="정리" id="{acf5cf70-a03e-ff56-f701-498cc7636229}">
+        <p14:section name="정리" id="{a5292c1f-6050-4b51-151e-db5261b08d3a}">
           <p14:sldIdLst>
             <p14:sldId id="270"/>
           </p14:sldIdLst>
         </p14:section>
-        <p14:section name="보충" id="{ab3b1f2a-9f47-52b2-7df1-c6225906de2c}">
+        <p14:section name="보충" id="{5144b8e4-4948-bd26-2ef2-d39455f24910}">
           <p14:sldIdLst>
             <p14:sldId id="271"/>
           </p14:sldIdLst>
@@ -18615,7 +18615,7 @@
                 <a:ea typeface="맑은 고딕" pitchFamily="34" charset="-122"/>
                 <a:cs typeface="맑은 고딕" pitchFamily="34" charset="-120"/>
               </a:rPr>
-              <a:t>다음 시간: 분류하기</a:t>
+              <a:t>다음 시간: 달력 보기</a:t>
             </a:r>
             <a:endParaRPr lang="ko-KR" sz="2600" dirty="0"/>
           </a:p>
